--- a/statistics_08_F_ANOVA.pptx
+++ b/statistics_08_F_ANOVA.pptx
@@ -5,12 +5,13 @@
     <p:sldMasterId id="2147483659" r:id="rId1"/>
   </p:sldMasterIdLst>
   <p:notesMasterIdLst>
-    <p:notesMasterId r:id="rId5"/>
+    <p:notesMasterId r:id="rId6"/>
   </p:notesMasterIdLst>
   <p:sldIdLst>
     <p:sldId id="278" r:id="rId2"/>
     <p:sldId id="279" r:id="rId3"/>
-    <p:sldId id="297" r:id="rId4"/>
+    <p:sldId id="298" r:id="rId4"/>
+    <p:sldId id="297" r:id="rId5"/>
   </p:sldIdLst>
   <p:sldSz cx="12192000" cy="6858000"/>
   <p:notesSz cx="6858000" cy="9144000"/>
@@ -13168,8 +13169,8 @@
         </p:nvSpPr>
         <p:spPr>
           <a:xfrm>
-            <a:off x="312820" y="180474"/>
-            <a:ext cx="5868524" cy="1446550"/>
+            <a:off x="0" y="0"/>
+            <a:ext cx="6551276" cy="1569660"/>
           </a:xfrm>
           <a:prstGeom prst="rect">
             <a:avLst/>
@@ -13200,42 +13201,51 @@
           </a:p>
           <a:p>
             <a:r>
-              <a:rPr lang="en-US" sz="1200" dirty="0"/>
+              <a:rPr lang="en-US" dirty="0"/>
               <a:t>F-distribution </a:t>
             </a:r>
           </a:p>
           <a:p>
+            <a:pPr marL="285750" indent="-285750">
+              <a:buFont typeface="Arial" panose="020B0604020202020204" pitchFamily="34" charset="0"/>
+              <a:buChar char="•"/>
+            </a:pPr>
             <a:r>
-              <a:rPr lang="en-US" sz="1200" dirty="0"/>
-              <a:t>  - right-skewed distribution used most commonly in Analysis of Variance.</a:t>
+              <a:rPr lang="en-US" dirty="0"/>
+              <a:t>right-skewed distribution used most commonly in Analysis of Variance.</a:t>
             </a:r>
-          </a:p>
-          <a:p>
+            <a:br>
+              <a:rPr lang="en-US" dirty="0"/>
+            </a:br>
             <a:r>
-              <a:rPr lang="en-US" sz="1200" dirty="0"/>
-              <a:t>  - ( </a:t>
+              <a:rPr lang="en-US" dirty="0"/>
+              <a:t>( </a:t>
             </a:r>
             <a:r>
-              <a:rPr lang="en-US" sz="1200" dirty="0">
+              <a:rPr lang="en-US" dirty="0">
                 <a:hlinkClick r:id="rId2"/>
               </a:rPr>
               <a:t>https://en.wikipedia.org/wiki/F-distribution</a:t>
             </a:r>
             <a:r>
-              <a:rPr lang="en-US" sz="1200" dirty="0"/>
+              <a:rPr lang="en-US" dirty="0"/>
               <a:t> ) </a:t>
             </a:r>
           </a:p>
           <a:p>
+            <a:pPr marL="285750" indent="-285750">
+              <a:buFont typeface="Arial" panose="020B0604020202020204" pitchFamily="34" charset="0"/>
+              <a:buChar char="•"/>
+            </a:pPr>
             <a:r>
-              <a:rPr lang="en-US" sz="1200" dirty="0"/>
-              <a:t>  - named after Ronald Fisher and George W. </a:t>
+              <a:rPr lang="en-US" dirty="0"/>
+              <a:t>named after Ronald Fisher and George W. </a:t>
             </a:r>
             <a:r>
-              <a:rPr lang="en-US" sz="1200" dirty="0" err="1"/>
+              <a:rPr lang="en-US" dirty="0" err="1"/>
               <a:t>Snedecor</a:t>
             </a:r>
-            <a:endParaRPr lang="en-US" sz="1200" dirty="0"/>
+            <a:endParaRPr lang="en-US" dirty="0"/>
           </a:p>
         </p:txBody>
       </p:sp>
@@ -13302,7 +13312,7 @@
         </p:blipFill>
         <p:spPr>
           <a:xfrm>
-            <a:off x="1255776" y="1816608"/>
+            <a:off x="1087827" y="1816608"/>
             <a:ext cx="1328928" cy="1560576"/>
           </a:xfrm>
           <a:prstGeom prst="rect">
@@ -13338,7 +13348,7 @@
         </p:blipFill>
         <p:spPr>
           <a:xfrm>
-            <a:off x="3465322" y="1816608"/>
+            <a:off x="3689254" y="1816608"/>
             <a:ext cx="1259593" cy="1328928"/>
           </a:xfrm>
           <a:prstGeom prst="rect">
@@ -13360,8 +13370,8 @@
         </p:nvSpPr>
         <p:spPr>
           <a:xfrm>
-            <a:off x="1024128" y="3511296"/>
-            <a:ext cx="2121408" cy="646331"/>
+            <a:off x="541177" y="3511296"/>
+            <a:ext cx="2473732" cy="738664"/>
           </a:xfrm>
           <a:prstGeom prst="rect">
             <a:avLst/>
@@ -13375,13 +13385,13 @@
           <a:lstStyle/>
           <a:p>
             <a:r>
-              <a:rPr lang="en-US" sz="1200" dirty="0"/>
+              <a:rPr lang="en-US" dirty="0"/>
               <a:t>Ronald Fisher 1890-1962</a:t>
             </a:r>
           </a:p>
           <a:p>
             <a:r>
-              <a:rPr lang="en-US" sz="1200" dirty="0"/>
+              <a:rPr lang="en-US" dirty="0"/>
               <a:t>British. Developed the analysis of variance ANOVA</a:t>
             </a:r>
           </a:p>
@@ -13401,8 +13411,8 @@
         </p:nvSpPr>
         <p:spPr>
           <a:xfrm>
-            <a:off x="3282442" y="3182112"/>
-            <a:ext cx="1627632" cy="461665"/>
+            <a:off x="3413068" y="3182112"/>
+            <a:ext cx="2002275" cy="523220"/>
           </a:xfrm>
           <a:prstGeom prst="rect">
             <a:avLst/>
@@ -13416,18 +13426,18 @@
           <a:lstStyle/>
           <a:p>
             <a:r>
-              <a:rPr lang="en-US" sz="1200" dirty="0"/>
+              <a:rPr lang="en-US" dirty="0"/>
               <a:t>George W. </a:t>
             </a:r>
             <a:r>
-              <a:rPr lang="en-US" sz="1200" dirty="0" err="1"/>
+              <a:rPr lang="en-US" dirty="0" err="1"/>
               <a:t>Snedecor</a:t>
             </a:r>
-            <a:endParaRPr lang="en-US" sz="1200" dirty="0"/>
+            <a:endParaRPr lang="en-US" dirty="0"/>
           </a:p>
           <a:p>
             <a:r>
-              <a:rPr lang="en-US" sz="1200" dirty="0"/>
+              <a:rPr lang="en-US" dirty="0"/>
               <a:t>1881-1974, USA </a:t>
             </a:r>
           </a:p>
@@ -13657,7 +13667,7 @@
         </p:nvSpPr>
         <p:spPr>
           <a:xfrm>
-            <a:off x="312820" y="180474"/>
+            <a:off x="34581" y="41145"/>
             <a:ext cx="5504884" cy="523220"/>
           </a:xfrm>
           <a:prstGeom prst="rect">
@@ -13713,7 +13723,7 @@
         </p:blipFill>
         <p:spPr>
           <a:xfrm>
-            <a:off x="451104" y="856289"/>
+            <a:off x="219456" y="538256"/>
             <a:ext cx="1328928" cy="1560576"/>
           </a:xfrm>
           <a:prstGeom prst="rect">
@@ -13735,8 +13745,8 @@
         </p:nvSpPr>
         <p:spPr>
           <a:xfrm>
-            <a:off x="219456" y="2550977"/>
-            <a:ext cx="2121408" cy="646331"/>
+            <a:off x="0" y="2119963"/>
+            <a:ext cx="2121408" cy="830997"/>
           </a:xfrm>
           <a:prstGeom prst="rect">
             <a:avLst/>
@@ -13765,7 +13775,7 @@
                   <a:srgbClr val="0070C0"/>
                 </a:solidFill>
               </a:rPr>
-              <a:t>ANOVA</a:t>
+              <a:t>ANOVA (1925)</a:t>
             </a:r>
             <a:endParaRPr lang="en-US" sz="1200" dirty="0"/>
           </a:p>
@@ -13785,8 +13795,8 @@
         </p:nvSpPr>
         <p:spPr>
           <a:xfrm>
-            <a:off x="2697556" y="950539"/>
-            <a:ext cx="6260857" cy="2246769"/>
+            <a:off x="2227490" y="842691"/>
+            <a:ext cx="7030809" cy="954107"/>
           </a:xfrm>
           <a:prstGeom prst="rect">
             <a:avLst/>
@@ -13800,6 +13810,10 @@
           <a:lstStyle/>
           <a:p>
             <a:r>
+              <a:rPr lang="en-US" dirty="0"/>
+              <a:t>In its simplest form, </a:t>
+            </a:r>
+            <a:r>
               <a:rPr lang="en-US" b="1" dirty="0">
                 <a:solidFill>
                   <a:srgbClr val="0070C0"/>
@@ -13809,95 +13823,66 @@
             </a:r>
             <a:r>
               <a:rPr lang="en-US" dirty="0"/>
-              <a:t> - a collection of statistical models and estimation procedures (such as the "variation" among and between groups) </a:t>
+              <a:t> provides a statistical test of </a:t>
+            </a:r>
+            <a:r>
+              <a:rPr lang="en-US" dirty="0">
+                <a:solidFill>
+                  <a:srgbClr val="0070C0"/>
+                </a:solidFill>
+              </a:rPr>
+              <a:t>whether two or more </a:t>
+            </a:r>
+            <a:r>
+              <a:rPr lang="en-US" dirty="0">
+                <a:solidFill>
+                  <a:srgbClr val="00B050"/>
+                </a:solidFill>
+              </a:rPr>
+              <a:t>population means </a:t>
+            </a:r>
+            <a:r>
+              <a:rPr lang="en-US" dirty="0">
+                <a:solidFill>
+                  <a:srgbClr val="0070C0"/>
+                </a:solidFill>
+              </a:rPr>
+              <a:t>are equal</a:t>
+            </a:r>
+            <a:r>
+              <a:rPr lang="en-US" dirty="0"/>
+              <a:t>, and therefore </a:t>
+            </a:r>
+            <a:r>
+              <a:rPr lang="en-US" dirty="0">
+                <a:solidFill>
+                  <a:srgbClr val="0070C0"/>
+                </a:solidFill>
+              </a:rPr>
+              <a:t>generalizes the t-test beyond two means.</a:t>
+            </a:r>
+            <a:endParaRPr lang="en-US" dirty="0"/>
+          </a:p>
+          <a:p>
+            <a:r>
+              <a:rPr lang="en-US" dirty="0"/>
+              <a:t>The observed variance in a particular variable is partitioned into component.</a:t>
             </a:r>
           </a:p>
           <a:p>
             <a:r>
               <a:rPr lang="en-US" dirty="0"/>
-              <a:t>used to analyze the differences among group means in a sample.</a:t>
-            </a:r>
-          </a:p>
-          <a:p>
-            <a:endParaRPr lang="en-US" dirty="0"/>
-          </a:p>
-          <a:p>
-            <a:r>
-              <a:rPr lang="en-US" dirty="0"/>
-              <a:t>The observed variance in a particular variable is partitioned into components attributable to different sources of variation. </a:t>
-            </a:r>
-          </a:p>
-          <a:p>
-            <a:endParaRPr lang="en-US" dirty="0"/>
-          </a:p>
-          <a:p>
-            <a:r>
-              <a:rPr lang="en-US" dirty="0"/>
-              <a:t>In its simplest form, </a:t>
+              <a:t>- </a:t>
             </a:r>
             <a:r>
-              <a:rPr lang="en-US" b="1" dirty="0">
-                <a:solidFill>
-                  <a:srgbClr val="0070C0"/>
-                </a:solidFill>
+              <a:rPr lang="en-US" dirty="0">
+                <a:hlinkClick r:id="rId3"/>
               </a:rPr>
-              <a:t>ANOVA</a:t>
+              <a:t>https://en.wikipedia.org/wiki/Analysis_of_variance</a:t>
             </a:r>
             <a:r>
               <a:rPr lang="en-US" dirty="0"/>
-              <a:t> provides a statistical test </a:t>
-            </a:r>
-          </a:p>
-          <a:p>
-            <a:r>
-              <a:rPr lang="en-US" dirty="0"/>
-              <a:t>of </a:t>
-            </a:r>
-            <a:r>
-              <a:rPr lang="en-US" dirty="0">
-                <a:solidFill>
-                  <a:srgbClr val="0070C0"/>
-                </a:solidFill>
-              </a:rPr>
-              <a:t>whether two or more </a:t>
-            </a:r>
-            <a:r>
-              <a:rPr lang="en-US" dirty="0">
-                <a:solidFill>
-                  <a:srgbClr val="00B050"/>
-                </a:solidFill>
-              </a:rPr>
-              <a:t>population means </a:t>
-            </a:r>
-            <a:r>
-              <a:rPr lang="en-US" dirty="0">
-                <a:solidFill>
-                  <a:srgbClr val="0070C0"/>
-                </a:solidFill>
-              </a:rPr>
-              <a:t>are equal</a:t>
-            </a:r>
-            <a:r>
-              <a:rPr lang="en-US" dirty="0"/>
-              <a:t>, </a:t>
-            </a:r>
-          </a:p>
-          <a:p>
-            <a:r>
-              <a:rPr lang="en-US" dirty="0"/>
-              <a:t>and therefore </a:t>
-            </a:r>
-            <a:r>
-              <a:rPr lang="en-US" dirty="0">
-                <a:solidFill>
-                  <a:srgbClr val="0070C0"/>
-                </a:solidFill>
-              </a:rPr>
-              <a:t>generalizes the t-test beyond two means</a:t>
-            </a:r>
-            <a:r>
-              <a:rPr lang="en-US" dirty="0"/>
-              <a:t>.</a:t>
+              <a:t> </a:t>
             </a:r>
           </a:p>
         </p:txBody>
@@ -13917,7 +13902,7 @@
           <p:nvPr/>
         </p:nvPicPr>
         <p:blipFill>
-          <a:blip r:embed="rId3" cstate="email">
+          <a:blip r:embed="rId4" cstate="email">
             <a:extLst>
               <a:ext uri="{28A0092B-C50C-407E-A947-70E740481C1C}">
                 <a14:useLocalDpi xmlns:a14="http://schemas.microsoft.com/office/drawing/2010/main"/>
@@ -13952,7 +13937,7 @@
         </p:nvSpPr>
         <p:spPr>
           <a:xfrm>
-            <a:off x="219456" y="3710609"/>
+            <a:off x="0" y="3902363"/>
             <a:ext cx="8540231" cy="2893100"/>
           </a:xfrm>
           <a:prstGeom prst="rect">
@@ -14014,7 +13999,14 @@
             </a:pPr>
             <a:r>
               <a:rPr lang="en-US" dirty="0"/>
-              <a:t>Uses additive data decomposition for exploratory data analysis. Uses sums of squares to indicate the variance of each component of the decomposition.</a:t>
+              <a:t>Uses additive data decomposition for exploratory data analysis. </a:t>
+            </a:r>
+            <a:br>
+              <a:rPr lang="en-US" dirty="0"/>
+            </a:br>
+            <a:r>
+              <a:rPr lang="en-US" dirty="0"/>
+              <a:t>Uses sums of squares to indicate the variance of each component of the decomposition.</a:t>
             </a:r>
           </a:p>
           <a:p>
@@ -14117,7 +14109,7 @@
           <p:nvPr/>
         </p:nvPicPr>
         <p:blipFill rotWithShape="1">
-          <a:blip r:embed="rId4" cstate="email">
+          <a:blip r:embed="rId5" cstate="email">
             <a:extLst>
               <a:ext uri="{28A0092B-C50C-407E-A947-70E740481C1C}">
                 <a14:useLocalDpi xmlns:a14="http://schemas.microsoft.com/office/drawing/2010/main"/>
@@ -14151,7 +14143,7 @@
         </p:nvSpPr>
         <p:spPr>
           <a:xfrm>
-            <a:off x="7686087" y="2779824"/>
+            <a:off x="7450469" y="3599628"/>
             <a:ext cx="1470991" cy="1169551"/>
           </a:xfrm>
           <a:prstGeom prst="rect">
@@ -14208,7 +14200,7 @@
         </p:nvSpPr>
         <p:spPr>
           <a:xfrm>
-            <a:off x="7672835" y="2537725"/>
+            <a:off x="7437217" y="3357529"/>
             <a:ext cx="1557197" cy="1557197"/>
           </a:xfrm>
           <a:prstGeom prst="ellipse">
@@ -14243,6 +14235,98 @@
           <a:p>
             <a:pPr algn="ctr"/>
             <a:endParaRPr lang="en-US"/>
+          </a:p>
+        </p:txBody>
+      </p:sp>
+      <p:sp>
+        <p:nvSpPr>
+          <p:cNvPr id="9" name="TextBox 8">
+            <a:extLst>
+              <a:ext uri="{FF2B5EF4-FFF2-40B4-BE49-F238E27FC236}">
+                <a16:creationId xmlns:a16="http://schemas.microsoft.com/office/drawing/2014/main" id="{E302D4DA-AD4A-3644-958D-2902C36DEBF0}"/>
+              </a:ext>
+            </a:extLst>
+          </p:cNvPr>
+          <p:cNvSpPr txBox="1"/>
+          <p:nvPr/>
+        </p:nvSpPr>
+        <p:spPr>
+          <a:xfrm>
+            <a:off x="2227489" y="1937845"/>
+            <a:ext cx="7030809" cy="523220"/>
+          </a:xfrm>
+          <a:prstGeom prst="rect">
+            <a:avLst/>
+          </a:prstGeom>
+          <a:noFill/>
+        </p:spPr>
+        <p:txBody>
+          <a:bodyPr wrap="square" rtlCol="0">
+            <a:spAutoFit/>
+          </a:bodyPr>
+          <a:lstStyle/>
+          <a:p>
+            <a:r>
+              <a:rPr lang="en-US" b="1" dirty="0">
+                <a:solidFill>
+                  <a:srgbClr val="0070C0"/>
+                </a:solidFill>
+              </a:rPr>
+              <a:t>One-way ANOVA</a:t>
+            </a:r>
+            <a:r>
+              <a:rPr lang="en-US" dirty="0"/>
+              <a:t> - compare means of two or more samples (using the F distribution). </a:t>
+            </a:r>
+          </a:p>
+          <a:p>
+            <a:r>
+              <a:rPr lang="en-US" dirty="0"/>
+              <a:t>Response data "Y" (numerical) and input data "X" (numerical or categorical)</a:t>
+            </a:r>
+          </a:p>
+        </p:txBody>
+      </p:sp>
+      <p:sp>
+        <p:nvSpPr>
+          <p:cNvPr id="11" name="TextBox 10">
+            <a:extLst>
+              <a:ext uri="{FF2B5EF4-FFF2-40B4-BE49-F238E27FC236}">
+                <a16:creationId xmlns:a16="http://schemas.microsoft.com/office/drawing/2014/main" id="{D6D38076-2431-9249-97F6-D9F98406D8AB}"/>
+              </a:ext>
+            </a:extLst>
+          </p:cNvPr>
+          <p:cNvSpPr txBox="1"/>
+          <p:nvPr/>
+        </p:nvSpPr>
+        <p:spPr>
+          <a:xfrm>
+            <a:off x="2229982" y="2499554"/>
+            <a:ext cx="7048500" cy="954107"/>
+          </a:xfrm>
+          <a:prstGeom prst="rect">
+            <a:avLst/>
+          </a:prstGeom>
+          <a:noFill/>
+        </p:spPr>
+        <p:txBody>
+          <a:bodyPr wrap="square" rtlCol="0">
+            <a:spAutoFit/>
+          </a:bodyPr>
+          <a:lstStyle/>
+          <a:p>
+            <a:r>
+              <a:rPr lang="en-US" b="1" dirty="0">
+                <a:solidFill>
+                  <a:srgbClr val="0070C0"/>
+                </a:solidFill>
+              </a:rPr>
+              <a:t>Two-way ANOVA </a:t>
+            </a:r>
+            <a:r>
+              <a:rPr lang="en-US" dirty="0"/>
+              <a:t>is an extension of the one-way ANOVA that examines the influence of two different categorical independent variables (X1, X2) on one continuous dependent variable "Y". Goal - assess the main effect of each independent variable and assess if there is any interaction between them.</a:t>
+            </a:r>
           </a:p>
         </p:txBody>
       </p:sp>
@@ -14281,6 +14365,470 @@
           <p:cNvPr id="4" name="TextBox 3">
             <a:extLst>
               <a:ext uri="{FF2B5EF4-FFF2-40B4-BE49-F238E27FC236}">
+                <a16:creationId xmlns:a16="http://schemas.microsoft.com/office/drawing/2014/main" id="{94089F3D-EFD8-1547-B43B-C1472E956605}"/>
+              </a:ext>
+            </a:extLst>
+          </p:cNvPr>
+          <p:cNvSpPr txBox="1"/>
+          <p:nvPr/>
+        </p:nvSpPr>
+        <p:spPr>
+          <a:xfrm>
+            <a:off x="190500" y="241300"/>
+            <a:ext cx="5245100" cy="3108543"/>
+          </a:xfrm>
+          <a:prstGeom prst="rect">
+            <a:avLst/>
+          </a:prstGeom>
+          <a:noFill/>
+        </p:spPr>
+        <p:txBody>
+          <a:bodyPr wrap="square" rtlCol="0">
+            <a:spAutoFit/>
+          </a:bodyPr>
+          <a:lstStyle/>
+          <a:p>
+            <a:r>
+              <a:rPr lang="en-US" sz="2800" b="1" dirty="0"/>
+              <a:t>ANOVA – Multilevel model</a:t>
+            </a:r>
+          </a:p>
+          <a:p>
+            <a:endParaRPr lang="en-US" dirty="0"/>
+          </a:p>
+          <a:p>
+            <a:r>
+              <a:rPr lang="en-US" dirty="0">
+                <a:hlinkClick r:id="rId2"/>
+              </a:rPr>
+              <a:t>https://en.wikipedia.org/wiki/Multilevel_model</a:t>
+            </a:r>
+            <a:endParaRPr lang="en-US" dirty="0"/>
+          </a:p>
+          <a:p>
+            <a:endParaRPr lang="en-US" dirty="0"/>
+          </a:p>
+          <a:p>
+            <a:r>
+              <a:rPr lang="en-US" dirty="0"/>
+              <a:t>Multilevel models, a.k.a.:</a:t>
+            </a:r>
+          </a:p>
+          <a:p>
+            <a:pPr marL="285750" indent="-285750">
+              <a:buFont typeface="Arial" panose="020B0604020202020204" pitchFamily="34" charset="0"/>
+              <a:buChar char="•"/>
+            </a:pPr>
+            <a:r>
+              <a:rPr lang="en-US" dirty="0"/>
+              <a:t>hierarchical linear models</a:t>
+            </a:r>
+          </a:p>
+          <a:p>
+            <a:pPr marL="285750" indent="-285750">
+              <a:buFont typeface="Arial" panose="020B0604020202020204" pitchFamily="34" charset="0"/>
+              <a:buChar char="•"/>
+            </a:pPr>
+            <a:r>
+              <a:rPr lang="en-US" dirty="0"/>
+              <a:t>linear mixed-effect model</a:t>
+            </a:r>
+          </a:p>
+          <a:p>
+            <a:pPr marL="285750" indent="-285750">
+              <a:buFont typeface="Arial" panose="020B0604020202020204" pitchFamily="34" charset="0"/>
+              <a:buChar char="•"/>
+            </a:pPr>
+            <a:r>
+              <a:rPr lang="en-US" dirty="0"/>
+              <a:t>mixed models</a:t>
+            </a:r>
+          </a:p>
+          <a:p>
+            <a:pPr marL="285750" indent="-285750">
+              <a:buFont typeface="Arial" panose="020B0604020202020204" pitchFamily="34" charset="0"/>
+              <a:buChar char="•"/>
+            </a:pPr>
+            <a:r>
+              <a:rPr lang="en-US" dirty="0"/>
+              <a:t>nested data models</a:t>
+            </a:r>
+          </a:p>
+          <a:p>
+            <a:pPr marL="285750" indent="-285750">
+              <a:buFont typeface="Arial" panose="020B0604020202020204" pitchFamily="34" charset="0"/>
+              <a:buChar char="•"/>
+            </a:pPr>
+            <a:r>
+              <a:rPr lang="en-US" dirty="0"/>
+              <a:t>random coefficient</a:t>
+            </a:r>
+          </a:p>
+          <a:p>
+            <a:pPr marL="285750" indent="-285750">
+              <a:buFont typeface="Arial" panose="020B0604020202020204" pitchFamily="34" charset="0"/>
+              <a:buChar char="•"/>
+            </a:pPr>
+            <a:r>
+              <a:rPr lang="en-US" dirty="0"/>
+              <a:t>random-effects models</a:t>
+            </a:r>
+          </a:p>
+          <a:p>
+            <a:pPr marL="285750" indent="-285750">
+              <a:buFont typeface="Arial" panose="020B0604020202020204" pitchFamily="34" charset="0"/>
+              <a:buChar char="•"/>
+            </a:pPr>
+            <a:r>
+              <a:rPr lang="en-US" dirty="0"/>
+              <a:t>random parameter models</a:t>
+            </a:r>
+          </a:p>
+          <a:p>
+            <a:pPr marL="285750" indent="-285750">
+              <a:buFont typeface="Arial" panose="020B0604020202020204" pitchFamily="34" charset="0"/>
+              <a:buChar char="•"/>
+            </a:pPr>
+            <a:r>
+              <a:rPr lang="en-US" dirty="0"/>
+              <a:t>split-plot designs</a:t>
+            </a:r>
+          </a:p>
+        </p:txBody>
+      </p:sp>
+      <p:pic>
+        <p:nvPicPr>
+          <p:cNvPr id="5" name="Picture 4">
+            <a:extLst>
+              <a:ext uri="{FF2B5EF4-FFF2-40B4-BE49-F238E27FC236}">
+                <a16:creationId xmlns:a16="http://schemas.microsoft.com/office/drawing/2014/main" id="{AA7C8C6B-30E1-7343-832D-E1695F1777CC}"/>
+              </a:ext>
+            </a:extLst>
+          </p:cNvPr>
+          <p:cNvPicPr>
+            <a:picLocks noChangeAspect="1"/>
+          </p:cNvPicPr>
+          <p:nvPr/>
+        </p:nvPicPr>
+        <p:blipFill>
+          <a:blip r:embed="rId3" cstate="email">
+            <a:extLst>
+              <a:ext uri="{28A0092B-C50C-407E-A947-70E740481C1C}">
+                <a14:useLocalDpi xmlns:a14="http://schemas.microsoft.com/office/drawing/2010/main"/>
+              </a:ext>
+            </a:extLst>
+          </a:blip>
+          <a:stretch>
+            <a:fillRect/>
+          </a:stretch>
+        </p:blipFill>
+        <p:spPr>
+          <a:xfrm>
+            <a:off x="8167289" y="43701"/>
+            <a:ext cx="3886200" cy="2387600"/>
+          </a:xfrm>
+          <a:prstGeom prst="rect">
+            <a:avLst/>
+          </a:prstGeom>
+        </p:spPr>
+      </p:pic>
+      <p:sp>
+        <p:nvSpPr>
+          <p:cNvPr id="6" name="TextBox 5">
+            <a:extLst>
+              <a:ext uri="{FF2B5EF4-FFF2-40B4-BE49-F238E27FC236}">
+                <a16:creationId xmlns:a16="http://schemas.microsoft.com/office/drawing/2014/main" id="{2FE86768-22E0-7A4D-AA01-084F32D8384E}"/>
+              </a:ext>
+            </a:extLst>
+          </p:cNvPr>
+          <p:cNvSpPr txBox="1"/>
+          <p:nvPr/>
+        </p:nvSpPr>
+        <p:spPr>
+          <a:xfrm>
+            <a:off x="0" y="4465982"/>
+            <a:ext cx="11047343" cy="2246769"/>
+          </a:xfrm>
+          <a:prstGeom prst="rect">
+            <a:avLst/>
+          </a:prstGeom>
+          <a:noFill/>
+        </p:spPr>
+        <p:txBody>
+          <a:bodyPr wrap="square" rtlCol="0">
+            <a:spAutoFit/>
+          </a:bodyPr>
+          <a:lstStyle/>
+          <a:p>
+            <a:r>
+              <a:rPr lang="en-US" dirty="0"/>
+              <a:t>Multilevel models can be used as an alternative to </a:t>
+            </a:r>
+            <a:r>
+              <a:rPr lang="en-US" b="1" dirty="0">
+                <a:solidFill>
+                  <a:srgbClr val="0070C0"/>
+                </a:solidFill>
+              </a:rPr>
+              <a:t>ANCOVA</a:t>
+            </a:r>
+            <a:r>
+              <a:rPr lang="en-US" dirty="0"/>
+              <a:t> (Analysis of Covariance). </a:t>
+            </a:r>
+          </a:p>
+          <a:p>
+            <a:r>
+              <a:rPr lang="en-US" b="1" dirty="0">
+                <a:solidFill>
+                  <a:srgbClr val="0070C0"/>
+                </a:solidFill>
+              </a:rPr>
+              <a:t>ANCOVA</a:t>
+            </a:r>
+            <a:r>
+              <a:rPr lang="en-US" dirty="0"/>
+              <a:t> blends ANOVA and regression. </a:t>
+            </a:r>
+            <a:br>
+              <a:rPr lang="en-US" dirty="0"/>
+            </a:br>
+            <a:r>
+              <a:rPr lang="en-US" b="1" dirty="0">
+                <a:solidFill>
+                  <a:srgbClr val="0070C0"/>
+                </a:solidFill>
+              </a:rPr>
+              <a:t>ANCOVA</a:t>
+            </a:r>
+            <a:r>
+              <a:rPr lang="en-US" dirty="0"/>
+              <a:t> evaluates whether the means of a dependent variable </a:t>
+            </a:r>
+            <a:r>
+              <a:rPr lang="en-US" b="1" dirty="0">
+                <a:solidFill>
+                  <a:srgbClr val="0070C0"/>
+                </a:solidFill>
+              </a:rPr>
+              <a:t>"Y"</a:t>
+            </a:r>
+            <a:r>
+              <a:rPr lang="en-US" dirty="0"/>
+              <a:t> </a:t>
+            </a:r>
+          </a:p>
+          <a:p>
+            <a:r>
+              <a:rPr lang="en-US" dirty="0"/>
+              <a:t>are equal across levels of a categorical independent variable </a:t>
+            </a:r>
+            <a:r>
+              <a:rPr lang="en-US" b="1" dirty="0">
+                <a:solidFill>
+                  <a:srgbClr val="0070C0"/>
+                </a:solidFill>
+              </a:rPr>
+              <a:t>"X"</a:t>
+            </a:r>
+            <a:r>
+              <a:rPr lang="en-US" dirty="0"/>
+              <a:t> often called a treatment, </a:t>
+            </a:r>
+          </a:p>
+          <a:p>
+            <a:r>
+              <a:rPr lang="en-US" dirty="0"/>
+              <a:t>while statistically controlling for the effects of other continuous variables (a.k.a. covariates </a:t>
+            </a:r>
+            <a:r>
+              <a:rPr lang="en-US" b="1" dirty="0">
+                <a:solidFill>
+                  <a:srgbClr val="0070C0"/>
+                </a:solidFill>
+              </a:rPr>
+              <a:t>"CVs"</a:t>
+            </a:r>
+            <a:r>
+              <a:rPr lang="en-US" dirty="0"/>
+              <a:t> or nuisance variables). </a:t>
+            </a:r>
+          </a:p>
+          <a:p>
+            <a:endParaRPr lang="en-US" dirty="0"/>
+          </a:p>
+          <a:p>
+            <a:r>
+              <a:rPr lang="en-US" dirty="0"/>
+              <a:t>Mathematically, </a:t>
+            </a:r>
+            <a:r>
+              <a:rPr lang="en-US" b="1" dirty="0">
+                <a:solidFill>
+                  <a:srgbClr val="0070C0"/>
+                </a:solidFill>
+              </a:rPr>
+              <a:t>ANCOVA</a:t>
+            </a:r>
+            <a:r>
+              <a:rPr lang="en-US" dirty="0"/>
+              <a:t> decomposes the variance in the </a:t>
+            </a:r>
+            <a:r>
+              <a:rPr lang="en-US" b="1" dirty="0">
+                <a:solidFill>
+                  <a:srgbClr val="0070C0"/>
+                </a:solidFill>
+              </a:rPr>
+              <a:t>"Y"</a:t>
+            </a:r>
+            <a:r>
+              <a:rPr lang="en-US" dirty="0"/>
+              <a:t> into variance explained by the </a:t>
+            </a:r>
+            <a:r>
+              <a:rPr lang="en-US" b="1" dirty="0">
+                <a:solidFill>
+                  <a:srgbClr val="0070C0"/>
+                </a:solidFill>
+              </a:rPr>
+              <a:t>CVs</a:t>
+            </a:r>
+            <a:r>
+              <a:rPr lang="en-US" dirty="0"/>
+              <a:t>, </a:t>
+            </a:r>
+          </a:p>
+          <a:p>
+            <a:r>
+              <a:rPr lang="en-US" dirty="0"/>
+              <a:t>variance explained by the categorical </a:t>
+            </a:r>
+            <a:r>
+              <a:rPr lang="en-US" b="1" dirty="0">
+                <a:solidFill>
+                  <a:srgbClr val="0070C0"/>
+                </a:solidFill>
+              </a:rPr>
+              <a:t>"X"</a:t>
+            </a:r>
+            <a:r>
+              <a:rPr lang="en-US" dirty="0"/>
+              <a:t>, and residual variance. </a:t>
+            </a:r>
+          </a:p>
+          <a:p>
+            <a:endParaRPr lang="en-US" dirty="0"/>
+          </a:p>
+          <a:p>
+            <a:r>
+              <a:rPr lang="en-US" dirty="0"/>
+              <a:t>Intuitively, </a:t>
+            </a:r>
+            <a:r>
+              <a:rPr lang="en-US" b="1" dirty="0">
+                <a:solidFill>
+                  <a:srgbClr val="0070C0"/>
+                </a:solidFill>
+              </a:rPr>
+              <a:t>ANCOVA</a:t>
+            </a:r>
+            <a:r>
+              <a:rPr lang="en-US" dirty="0"/>
+              <a:t> can be thought of as 'adjusting' the </a:t>
+            </a:r>
+            <a:r>
+              <a:rPr lang="en-US" b="1" dirty="0">
+                <a:solidFill>
+                  <a:srgbClr val="0070C0"/>
+                </a:solidFill>
+              </a:rPr>
+              <a:t>"Y"</a:t>
+            </a:r>
+            <a:r>
+              <a:rPr lang="en-US" dirty="0"/>
+              <a:t> by the group means of the </a:t>
+            </a:r>
+            <a:r>
+              <a:rPr lang="en-US" b="1" dirty="0">
+                <a:solidFill>
+                  <a:srgbClr val="0070C0"/>
+                </a:solidFill>
+              </a:rPr>
+              <a:t>CVs</a:t>
+            </a:r>
+            <a:r>
+              <a:rPr lang="en-US" dirty="0"/>
+              <a:t>.</a:t>
+            </a:r>
+          </a:p>
+        </p:txBody>
+      </p:sp>
+      <p:pic>
+        <p:nvPicPr>
+          <p:cNvPr id="7" name="Picture 6">
+            <a:extLst>
+              <a:ext uri="{FF2B5EF4-FFF2-40B4-BE49-F238E27FC236}">
+                <a16:creationId xmlns:a16="http://schemas.microsoft.com/office/drawing/2014/main" id="{179F76E7-4CB6-AD42-A163-A516D79DEAA5}"/>
+              </a:ext>
+            </a:extLst>
+          </p:cNvPr>
+          <p:cNvPicPr>
+            <a:picLocks noChangeAspect="1"/>
+          </p:cNvPicPr>
+          <p:nvPr/>
+        </p:nvPicPr>
+        <p:blipFill>
+          <a:blip r:embed="rId4"/>
+          <a:stretch>
+            <a:fillRect/>
+          </a:stretch>
+        </p:blipFill>
+        <p:spPr>
+          <a:xfrm>
+            <a:off x="3933457" y="2628900"/>
+            <a:ext cx="5852044" cy="1639483"/>
+          </a:xfrm>
+          <a:prstGeom prst="rect">
+            <a:avLst/>
+          </a:prstGeom>
+        </p:spPr>
+      </p:pic>
+    </p:spTree>
+    <p:extLst>
+      <p:ext uri="{BB962C8B-B14F-4D97-AF65-F5344CB8AC3E}">
+        <p14:creationId xmlns:p14="http://schemas.microsoft.com/office/powerpoint/2010/main" val="3520464611"/>
+      </p:ext>
+    </p:extLst>
+  </p:cSld>
+  <p:clrMapOvr>
+    <a:masterClrMapping/>
+  </p:clrMapOvr>
+</p:sld>
+</file>
+
+<file path=ppt/slides/slide4.xml><?xml version="1.0" encoding="utf-8"?>
+<p:sld xmlns:a="http://schemas.openxmlformats.org/drawingml/2006/main" xmlns:r="http://schemas.openxmlformats.org/officeDocument/2006/relationships" xmlns:p="http://schemas.openxmlformats.org/presentationml/2006/main">
+  <p:cSld>
+    <p:spTree>
+      <p:nvGrpSpPr>
+        <p:cNvPr id="1" name=""/>
+        <p:cNvGrpSpPr/>
+        <p:nvPr/>
+      </p:nvGrpSpPr>
+      <p:grpSpPr>
+        <a:xfrm>
+          <a:off x="0" y="0"/>
+          <a:ext cx="0" cy="0"/>
+          <a:chOff x="0" y="0"/>
+          <a:chExt cx="0" cy="0"/>
+        </a:xfrm>
+      </p:grpSpPr>
+      <p:sp>
+        <p:nvSpPr>
+          <p:cNvPr id="4" name="TextBox 3">
+            <a:extLst>
+              <a:ext uri="{FF2B5EF4-FFF2-40B4-BE49-F238E27FC236}">
                 <a16:creationId xmlns:a16="http://schemas.microsoft.com/office/drawing/2014/main" id="{4907E199-707A-CC4C-BC60-0587CD338441}"/>
               </a:ext>
             </a:extLst>
@@ -14291,7 +14839,7 @@
         <p:spPr>
           <a:xfrm>
             <a:off x="0" y="0"/>
-            <a:ext cx="5813155" cy="2400657"/>
+            <a:ext cx="5813155" cy="1754326"/>
           </a:xfrm>
           <a:prstGeom prst="rect">
             <a:avLst/>
@@ -14319,9 +14867,6 @@
             </a:r>
           </a:p>
           <a:p>
-            <a:endParaRPr lang="en-US" dirty="0"/>
-          </a:p>
-          <a:p>
             <a:r>
               <a:rPr lang="en-US" dirty="0"/>
               <a:t>Lady Tasting Tea example in 2</a:t>
@@ -14336,16 +14881,10 @@
             </a:r>
           </a:p>
           <a:p>
-            <a:endParaRPr lang="en-US" dirty="0"/>
-          </a:p>
-          <a:p>
             <a:r>
               <a:rPr lang="en-US" dirty="0"/>
               <a:t>Lady claimed that she ca distinguish between two types of cups of tea:</a:t>
             </a:r>
-          </a:p>
-          <a:p>
-            <a:endParaRPr lang="en-US" dirty="0"/>
           </a:p>
           <a:p>
             <a:pPr marL="342900" lvl="2" indent="-342900">
@@ -14611,7 +15150,7 @@
         </p:blipFill>
         <p:spPr>
           <a:xfrm>
-            <a:off x="1854167" y="2487160"/>
+            <a:off x="1447912" y="2100903"/>
             <a:ext cx="2104820" cy="1578615"/>
           </a:xfrm>
           <a:prstGeom prst="rect">
@@ -14670,7 +15209,7 @@
           <a:p>
             <a:r>
               <a:rPr lang="en-US" dirty="0"/>
-              <a:t>Lady should test them and label the "milk first" ones.</a:t>
+              <a:t>Lady tests them and labels the "milk first" ones.</a:t>
             </a:r>
           </a:p>
           <a:p>

--- a/statistics_08_F_ANOVA.pptx
+++ b/statistics_08_F_ANOVA.pptx
@@ -14935,7 +14935,7 @@
         </p:blipFill>
         <p:spPr>
           <a:xfrm>
-            <a:off x="10111939" y="114168"/>
+            <a:off x="10624003" y="114168"/>
             <a:ext cx="1328928" cy="1560576"/>
           </a:xfrm>
           <a:prstGeom prst="rect">
@@ -14971,7 +14971,7 @@
         </p:blipFill>
         <p:spPr>
           <a:xfrm>
-            <a:off x="5952067" y="114168"/>
+            <a:off x="8378275" y="114168"/>
             <a:ext cx="2057400" cy="3162300"/>
           </a:xfrm>
           <a:prstGeom prst="rect">
@@ -14993,7 +14993,7 @@
         </p:nvSpPr>
         <p:spPr>
           <a:xfrm>
-            <a:off x="6662714" y="3276468"/>
+            <a:off x="8576858" y="3276468"/>
             <a:ext cx="636105" cy="307777"/>
           </a:xfrm>
           <a:prstGeom prst="rect">
@@ -15042,7 +15042,7 @@
         </p:blipFill>
         <p:spPr>
           <a:xfrm>
-            <a:off x="9992669" y="1812235"/>
+            <a:off x="10504733" y="1812235"/>
             <a:ext cx="1616964" cy="2155952"/>
           </a:xfrm>
           <a:prstGeom prst="rect">
@@ -15078,7 +15078,7 @@
         </p:blipFill>
         <p:spPr>
           <a:xfrm>
-            <a:off x="9992669" y="4105678"/>
+            <a:off x="10504733" y="4105678"/>
             <a:ext cx="1640127" cy="2272748"/>
           </a:xfrm>
           <a:prstGeom prst="rect">
@@ -15114,7 +15114,7 @@
         </p:blipFill>
         <p:spPr>
           <a:xfrm>
-            <a:off x="6786718" y="3968187"/>
+            <a:off x="7298782" y="3968187"/>
             <a:ext cx="2667000" cy="2743200"/>
           </a:xfrm>
           <a:prstGeom prst="rect">
@@ -15150,8 +15150,8 @@
         </p:blipFill>
         <p:spPr>
           <a:xfrm>
-            <a:off x="1447912" y="2100903"/>
-            <a:ext cx="2104820" cy="1578615"/>
+            <a:off x="6541380" y="1086961"/>
+            <a:ext cx="1567420" cy="1175565"/>
           </a:xfrm>
           <a:prstGeom prst="rect">
             <a:avLst/>
@@ -15172,7 +15172,7 @@
         </p:nvSpPr>
         <p:spPr>
           <a:xfrm>
-            <a:off x="97999" y="4216178"/>
+            <a:off x="47140" y="1812235"/>
             <a:ext cx="5813155" cy="2462213"/>
           </a:xfrm>
           <a:prstGeom prst="rect">
@@ -15231,7 +15231,7 @@
           <a:p>
             <a:r>
               <a:rPr lang="en-US" dirty="0"/>
-              <a:t>If she guessed 3 out of 4, the probability is 0.22 – not good</a:t>
+              <a:t>If she guessed 3 out of 4, the probability is 16/70 = 0.22 – not good</a:t>
             </a:r>
           </a:p>
           <a:p>
@@ -15239,6 +15239,505 @@
               <a:rPr lang="en-US" dirty="0"/>
               <a:t>If she guessed 4 out of 4 – the probability is 1/70 &lt; 0.05 - good</a:t>
             </a:r>
+          </a:p>
+        </p:txBody>
+      </p:sp>
+      <p:sp>
+        <p:nvSpPr>
+          <p:cNvPr id="14" name="TextBox 13">
+            <a:extLst>
+              <a:ext uri="{FF2B5EF4-FFF2-40B4-BE49-F238E27FC236}">
+                <a16:creationId xmlns:a16="http://schemas.microsoft.com/office/drawing/2014/main" id="{484816C1-C588-2A46-A6ED-BDB416A2F4A0}"/>
+              </a:ext>
+            </a:extLst>
+          </p:cNvPr>
+          <p:cNvSpPr txBox="1"/>
+          <p:nvPr/>
+        </p:nvSpPr>
+        <p:spPr>
+          <a:xfrm>
+            <a:off x="93479" y="4469520"/>
+            <a:ext cx="6040637" cy="2123658"/>
+          </a:xfrm>
+          <a:prstGeom prst="rect">
+            <a:avLst/>
+          </a:prstGeom>
+          <a:noFill/>
+        </p:spPr>
+        <p:txBody>
+          <a:bodyPr wrap="square" rtlCol="0">
+            <a:spAutoFit/>
+          </a:bodyPr>
+          <a:lstStyle/>
+          <a:p>
+            <a:r>
+              <a:rPr lang="en-US" sz="1200" b="1" dirty="0">
+                <a:solidFill>
+                  <a:srgbClr val="0070C0"/>
+                </a:solidFill>
+                <a:latin typeface="Menlo" panose="020B0609030804020204" pitchFamily="49" charset="0"/>
+                <a:ea typeface="Menlo" panose="020B0609030804020204" pitchFamily="49" charset="0"/>
+                <a:cs typeface="Menlo" panose="020B0609030804020204" pitchFamily="49" charset="0"/>
+              </a:rPr>
+              <a:t>Success     Combinations                          Number of</a:t>
+            </a:r>
+          </a:p>
+          <a:p>
+            <a:r>
+              <a:rPr lang="en-US" sz="1200" b="1" dirty="0">
+                <a:solidFill>
+                  <a:srgbClr val="0070C0"/>
+                </a:solidFill>
+                <a:latin typeface="Menlo" panose="020B0609030804020204" pitchFamily="49" charset="0"/>
+                <a:ea typeface="Menlo" panose="020B0609030804020204" pitchFamily="49" charset="0"/>
+                <a:cs typeface="Menlo" panose="020B0609030804020204" pitchFamily="49" charset="0"/>
+              </a:rPr>
+              <a:t>count                                             Combinations</a:t>
+            </a:r>
+          </a:p>
+          <a:p>
+            <a:r>
+              <a:rPr lang="en-US" sz="1200" b="1" dirty="0">
+                <a:solidFill>
+                  <a:srgbClr val="0070C0"/>
+                </a:solidFill>
+                <a:latin typeface="Menlo" panose="020B0609030804020204" pitchFamily="49" charset="0"/>
+                <a:ea typeface="Menlo" panose="020B0609030804020204" pitchFamily="49" charset="0"/>
+                <a:cs typeface="Menlo" panose="020B0609030804020204" pitchFamily="49" charset="0"/>
+              </a:rPr>
+              <a:t>------------------------------------------------------------</a:t>
+            </a:r>
+          </a:p>
+          <a:p>
+            <a:r>
+              <a:rPr lang="en-US" sz="1200" b="1" dirty="0">
+                <a:solidFill>
+                  <a:srgbClr val="0070C0"/>
+                </a:solidFill>
+                <a:latin typeface="Menlo" panose="020B0609030804020204" pitchFamily="49" charset="0"/>
+                <a:ea typeface="Menlo" panose="020B0609030804020204" pitchFamily="49" charset="0"/>
+                <a:cs typeface="Menlo" panose="020B0609030804020204" pitchFamily="49" charset="0"/>
+              </a:rPr>
+              <a:t>  0         </a:t>
+            </a:r>
+            <a:r>
+              <a:rPr lang="en-US" sz="1200" b="1" dirty="0" err="1">
+                <a:solidFill>
+                  <a:srgbClr val="0070C0"/>
+                </a:solidFill>
+                <a:latin typeface="Menlo" panose="020B0609030804020204" pitchFamily="49" charset="0"/>
+                <a:ea typeface="Menlo" panose="020B0609030804020204" pitchFamily="49" charset="0"/>
+                <a:cs typeface="Menlo" panose="020B0609030804020204" pitchFamily="49" charset="0"/>
+              </a:rPr>
+              <a:t>oooo</a:t>
+            </a:r>
+            <a:r>
+              <a:rPr lang="en-US" sz="1200" b="1" dirty="0">
+                <a:solidFill>
+                  <a:srgbClr val="0070C0"/>
+                </a:solidFill>
+                <a:latin typeface="Menlo" panose="020B0609030804020204" pitchFamily="49" charset="0"/>
+                <a:ea typeface="Menlo" panose="020B0609030804020204" pitchFamily="49" charset="0"/>
+                <a:cs typeface="Menlo" panose="020B0609030804020204" pitchFamily="49" charset="0"/>
+              </a:rPr>
+              <a:t>                                  1 × 1 = 1</a:t>
+            </a:r>
+          </a:p>
+          <a:p>
+            <a:r>
+              <a:rPr lang="en-US" sz="1200" b="1" dirty="0">
+                <a:solidFill>
+                  <a:srgbClr val="0070C0"/>
+                </a:solidFill>
+                <a:latin typeface="Menlo" panose="020B0609030804020204" pitchFamily="49" charset="0"/>
+                <a:ea typeface="Menlo" panose="020B0609030804020204" pitchFamily="49" charset="0"/>
+                <a:cs typeface="Menlo" panose="020B0609030804020204" pitchFamily="49" charset="0"/>
+              </a:rPr>
+              <a:t>  1         </a:t>
+            </a:r>
+            <a:r>
+              <a:rPr lang="en-US" sz="1200" b="1" dirty="0" err="1">
+                <a:solidFill>
+                  <a:srgbClr val="0070C0"/>
+                </a:solidFill>
+                <a:latin typeface="Menlo" panose="020B0609030804020204" pitchFamily="49" charset="0"/>
+                <a:ea typeface="Menlo" panose="020B0609030804020204" pitchFamily="49" charset="0"/>
+                <a:cs typeface="Menlo" panose="020B0609030804020204" pitchFamily="49" charset="0"/>
+              </a:rPr>
+              <a:t>ooox</a:t>
+            </a:r>
+            <a:r>
+              <a:rPr lang="en-US" sz="1200" b="1" dirty="0">
+                <a:solidFill>
+                  <a:srgbClr val="0070C0"/>
+                </a:solidFill>
+                <a:latin typeface="Menlo" panose="020B0609030804020204" pitchFamily="49" charset="0"/>
+                <a:ea typeface="Menlo" panose="020B0609030804020204" pitchFamily="49" charset="0"/>
+                <a:cs typeface="Menlo" panose="020B0609030804020204" pitchFamily="49" charset="0"/>
+              </a:rPr>
+              <a:t>, </a:t>
+            </a:r>
+            <a:r>
+              <a:rPr lang="en-US" sz="1200" b="1" dirty="0" err="1">
+                <a:solidFill>
+                  <a:srgbClr val="0070C0"/>
+                </a:solidFill>
+                <a:latin typeface="Menlo" panose="020B0609030804020204" pitchFamily="49" charset="0"/>
+                <a:ea typeface="Menlo" panose="020B0609030804020204" pitchFamily="49" charset="0"/>
+                <a:cs typeface="Menlo" panose="020B0609030804020204" pitchFamily="49" charset="0"/>
+              </a:rPr>
+              <a:t>ooxo</a:t>
+            </a:r>
+            <a:r>
+              <a:rPr lang="en-US" sz="1200" b="1" dirty="0">
+                <a:solidFill>
+                  <a:srgbClr val="0070C0"/>
+                </a:solidFill>
+                <a:latin typeface="Menlo" panose="020B0609030804020204" pitchFamily="49" charset="0"/>
+                <a:ea typeface="Menlo" panose="020B0609030804020204" pitchFamily="49" charset="0"/>
+                <a:cs typeface="Menlo" panose="020B0609030804020204" pitchFamily="49" charset="0"/>
+              </a:rPr>
+              <a:t>, </a:t>
+            </a:r>
+            <a:r>
+              <a:rPr lang="en-US" sz="1200" b="1" dirty="0" err="1">
+                <a:solidFill>
+                  <a:srgbClr val="0070C0"/>
+                </a:solidFill>
+                <a:latin typeface="Menlo" panose="020B0609030804020204" pitchFamily="49" charset="0"/>
+                <a:ea typeface="Menlo" panose="020B0609030804020204" pitchFamily="49" charset="0"/>
+                <a:cs typeface="Menlo" panose="020B0609030804020204" pitchFamily="49" charset="0"/>
+              </a:rPr>
+              <a:t>oxoo</a:t>
+            </a:r>
+            <a:r>
+              <a:rPr lang="en-US" sz="1200" b="1" dirty="0">
+                <a:solidFill>
+                  <a:srgbClr val="0070C0"/>
+                </a:solidFill>
+                <a:latin typeface="Menlo" panose="020B0609030804020204" pitchFamily="49" charset="0"/>
+                <a:ea typeface="Menlo" panose="020B0609030804020204" pitchFamily="49" charset="0"/>
+                <a:cs typeface="Menlo" panose="020B0609030804020204" pitchFamily="49" charset="0"/>
+              </a:rPr>
+              <a:t>, </a:t>
+            </a:r>
+            <a:r>
+              <a:rPr lang="en-US" sz="1200" b="1" dirty="0" err="1">
+                <a:solidFill>
+                  <a:srgbClr val="0070C0"/>
+                </a:solidFill>
+                <a:latin typeface="Menlo" panose="020B0609030804020204" pitchFamily="49" charset="0"/>
+                <a:ea typeface="Menlo" panose="020B0609030804020204" pitchFamily="49" charset="0"/>
+                <a:cs typeface="Menlo" panose="020B0609030804020204" pitchFamily="49" charset="0"/>
+              </a:rPr>
+              <a:t>xooo</a:t>
+            </a:r>
+            <a:r>
+              <a:rPr lang="en-US" sz="1200" b="1" dirty="0">
+                <a:solidFill>
+                  <a:srgbClr val="0070C0"/>
+                </a:solidFill>
+                <a:latin typeface="Menlo" panose="020B0609030804020204" pitchFamily="49" charset="0"/>
+                <a:ea typeface="Menlo" panose="020B0609030804020204" pitchFamily="49" charset="0"/>
+                <a:cs typeface="Menlo" panose="020B0609030804020204" pitchFamily="49" charset="0"/>
+              </a:rPr>
+              <a:t>                4 × 4 = 16</a:t>
+            </a:r>
+          </a:p>
+          <a:p>
+            <a:r>
+              <a:rPr lang="en-US" sz="1200" b="1" dirty="0">
+                <a:solidFill>
+                  <a:srgbClr val="0070C0"/>
+                </a:solidFill>
+                <a:latin typeface="Menlo" panose="020B0609030804020204" pitchFamily="49" charset="0"/>
+                <a:ea typeface="Menlo" panose="020B0609030804020204" pitchFamily="49" charset="0"/>
+                <a:cs typeface="Menlo" panose="020B0609030804020204" pitchFamily="49" charset="0"/>
+              </a:rPr>
+              <a:t>  2         </a:t>
+            </a:r>
+            <a:r>
+              <a:rPr lang="en-US" sz="1200" b="1" dirty="0" err="1">
+                <a:solidFill>
+                  <a:srgbClr val="0070C0"/>
+                </a:solidFill>
+                <a:latin typeface="Menlo" panose="020B0609030804020204" pitchFamily="49" charset="0"/>
+                <a:ea typeface="Menlo" panose="020B0609030804020204" pitchFamily="49" charset="0"/>
+                <a:cs typeface="Menlo" panose="020B0609030804020204" pitchFamily="49" charset="0"/>
+              </a:rPr>
+              <a:t>ooxx</a:t>
+            </a:r>
+            <a:r>
+              <a:rPr lang="en-US" sz="1200" b="1" dirty="0">
+                <a:solidFill>
+                  <a:srgbClr val="0070C0"/>
+                </a:solidFill>
+                <a:latin typeface="Menlo" panose="020B0609030804020204" pitchFamily="49" charset="0"/>
+                <a:ea typeface="Menlo" panose="020B0609030804020204" pitchFamily="49" charset="0"/>
+                <a:cs typeface="Menlo" panose="020B0609030804020204" pitchFamily="49" charset="0"/>
+              </a:rPr>
+              <a:t>, </a:t>
+            </a:r>
+            <a:r>
+              <a:rPr lang="en-US" sz="1200" b="1" dirty="0" err="1">
+                <a:solidFill>
+                  <a:srgbClr val="0070C0"/>
+                </a:solidFill>
+                <a:latin typeface="Menlo" panose="020B0609030804020204" pitchFamily="49" charset="0"/>
+                <a:ea typeface="Menlo" panose="020B0609030804020204" pitchFamily="49" charset="0"/>
+                <a:cs typeface="Menlo" panose="020B0609030804020204" pitchFamily="49" charset="0"/>
+              </a:rPr>
+              <a:t>oxox</a:t>
+            </a:r>
+            <a:r>
+              <a:rPr lang="en-US" sz="1200" b="1" dirty="0">
+                <a:solidFill>
+                  <a:srgbClr val="0070C0"/>
+                </a:solidFill>
+                <a:latin typeface="Menlo" panose="020B0609030804020204" pitchFamily="49" charset="0"/>
+                <a:ea typeface="Menlo" panose="020B0609030804020204" pitchFamily="49" charset="0"/>
+                <a:cs typeface="Menlo" panose="020B0609030804020204" pitchFamily="49" charset="0"/>
+              </a:rPr>
+              <a:t>, </a:t>
+            </a:r>
+            <a:r>
+              <a:rPr lang="en-US" sz="1200" b="1" dirty="0" err="1">
+                <a:solidFill>
+                  <a:srgbClr val="0070C0"/>
+                </a:solidFill>
+                <a:latin typeface="Menlo" panose="020B0609030804020204" pitchFamily="49" charset="0"/>
+                <a:ea typeface="Menlo" panose="020B0609030804020204" pitchFamily="49" charset="0"/>
+                <a:cs typeface="Menlo" panose="020B0609030804020204" pitchFamily="49" charset="0"/>
+              </a:rPr>
+              <a:t>oxxo</a:t>
+            </a:r>
+            <a:r>
+              <a:rPr lang="en-US" sz="1200" b="1" dirty="0">
+                <a:solidFill>
+                  <a:srgbClr val="0070C0"/>
+                </a:solidFill>
+                <a:latin typeface="Menlo" panose="020B0609030804020204" pitchFamily="49" charset="0"/>
+                <a:ea typeface="Menlo" panose="020B0609030804020204" pitchFamily="49" charset="0"/>
+                <a:cs typeface="Menlo" panose="020B0609030804020204" pitchFamily="49" charset="0"/>
+              </a:rPr>
+              <a:t>, xoxo, </a:t>
+            </a:r>
+            <a:r>
+              <a:rPr lang="en-US" sz="1200" b="1" dirty="0" err="1">
+                <a:solidFill>
+                  <a:srgbClr val="0070C0"/>
+                </a:solidFill>
+                <a:latin typeface="Menlo" panose="020B0609030804020204" pitchFamily="49" charset="0"/>
+                <a:ea typeface="Menlo" panose="020B0609030804020204" pitchFamily="49" charset="0"/>
+                <a:cs typeface="Menlo" panose="020B0609030804020204" pitchFamily="49" charset="0"/>
+              </a:rPr>
+              <a:t>xxoo</a:t>
+            </a:r>
+            <a:r>
+              <a:rPr lang="en-US" sz="1200" b="1" dirty="0">
+                <a:solidFill>
+                  <a:srgbClr val="0070C0"/>
+                </a:solidFill>
+                <a:latin typeface="Menlo" panose="020B0609030804020204" pitchFamily="49" charset="0"/>
+                <a:ea typeface="Menlo" panose="020B0609030804020204" pitchFamily="49" charset="0"/>
+                <a:cs typeface="Menlo" panose="020B0609030804020204" pitchFamily="49" charset="0"/>
+              </a:rPr>
+              <a:t>, </a:t>
+            </a:r>
+            <a:r>
+              <a:rPr lang="en-US" sz="1200" b="1" dirty="0" err="1">
+                <a:solidFill>
+                  <a:srgbClr val="0070C0"/>
+                </a:solidFill>
+                <a:latin typeface="Menlo" panose="020B0609030804020204" pitchFamily="49" charset="0"/>
+                <a:ea typeface="Menlo" panose="020B0609030804020204" pitchFamily="49" charset="0"/>
+                <a:cs typeface="Menlo" panose="020B0609030804020204" pitchFamily="49" charset="0"/>
+              </a:rPr>
+              <a:t>xoox</a:t>
+            </a:r>
+            <a:r>
+              <a:rPr lang="en-US" sz="1200" b="1" dirty="0">
+                <a:solidFill>
+                  <a:srgbClr val="0070C0"/>
+                </a:solidFill>
+                <a:latin typeface="Menlo" panose="020B0609030804020204" pitchFamily="49" charset="0"/>
+                <a:ea typeface="Menlo" panose="020B0609030804020204" pitchFamily="49" charset="0"/>
+                <a:cs typeface="Menlo" panose="020B0609030804020204" pitchFamily="49" charset="0"/>
+              </a:rPr>
+              <a:t>    6 × 6 = 36</a:t>
+            </a:r>
+          </a:p>
+          <a:p>
+            <a:r>
+              <a:rPr lang="en-US" sz="1200" b="1" dirty="0">
+                <a:solidFill>
+                  <a:srgbClr val="0070C0"/>
+                </a:solidFill>
+                <a:latin typeface="Menlo" panose="020B0609030804020204" pitchFamily="49" charset="0"/>
+                <a:ea typeface="Menlo" panose="020B0609030804020204" pitchFamily="49" charset="0"/>
+                <a:cs typeface="Menlo" panose="020B0609030804020204" pitchFamily="49" charset="0"/>
+              </a:rPr>
+              <a:t>  3         </a:t>
+            </a:r>
+            <a:r>
+              <a:rPr lang="en-US" sz="1200" b="1" dirty="0" err="1">
+                <a:solidFill>
+                  <a:srgbClr val="0070C0"/>
+                </a:solidFill>
+                <a:latin typeface="Menlo" panose="020B0609030804020204" pitchFamily="49" charset="0"/>
+                <a:ea typeface="Menlo" panose="020B0609030804020204" pitchFamily="49" charset="0"/>
+                <a:cs typeface="Menlo" panose="020B0609030804020204" pitchFamily="49" charset="0"/>
+              </a:rPr>
+              <a:t>oxxx</a:t>
+            </a:r>
+            <a:r>
+              <a:rPr lang="en-US" sz="1200" b="1" dirty="0">
+                <a:solidFill>
+                  <a:srgbClr val="0070C0"/>
+                </a:solidFill>
+                <a:latin typeface="Menlo" panose="020B0609030804020204" pitchFamily="49" charset="0"/>
+                <a:ea typeface="Menlo" panose="020B0609030804020204" pitchFamily="49" charset="0"/>
+                <a:cs typeface="Menlo" panose="020B0609030804020204" pitchFamily="49" charset="0"/>
+              </a:rPr>
+              <a:t>, </a:t>
+            </a:r>
+            <a:r>
+              <a:rPr lang="en-US" sz="1200" b="1" dirty="0" err="1">
+                <a:solidFill>
+                  <a:srgbClr val="0070C0"/>
+                </a:solidFill>
+                <a:latin typeface="Menlo" panose="020B0609030804020204" pitchFamily="49" charset="0"/>
+                <a:ea typeface="Menlo" panose="020B0609030804020204" pitchFamily="49" charset="0"/>
+                <a:cs typeface="Menlo" panose="020B0609030804020204" pitchFamily="49" charset="0"/>
+              </a:rPr>
+              <a:t>xoxx</a:t>
+            </a:r>
+            <a:r>
+              <a:rPr lang="en-US" sz="1200" b="1" dirty="0">
+                <a:solidFill>
+                  <a:srgbClr val="0070C0"/>
+                </a:solidFill>
+                <a:latin typeface="Menlo" panose="020B0609030804020204" pitchFamily="49" charset="0"/>
+                <a:ea typeface="Menlo" panose="020B0609030804020204" pitchFamily="49" charset="0"/>
+                <a:cs typeface="Menlo" panose="020B0609030804020204" pitchFamily="49" charset="0"/>
+              </a:rPr>
+              <a:t>, </a:t>
+            </a:r>
+            <a:r>
+              <a:rPr lang="en-US" sz="1200" b="1" dirty="0" err="1">
+                <a:solidFill>
+                  <a:srgbClr val="0070C0"/>
+                </a:solidFill>
+                <a:latin typeface="Menlo" panose="020B0609030804020204" pitchFamily="49" charset="0"/>
+                <a:ea typeface="Menlo" panose="020B0609030804020204" pitchFamily="49" charset="0"/>
+                <a:cs typeface="Menlo" panose="020B0609030804020204" pitchFamily="49" charset="0"/>
+              </a:rPr>
+              <a:t>xxox</a:t>
+            </a:r>
+            <a:r>
+              <a:rPr lang="en-US" sz="1200" b="1" dirty="0">
+                <a:solidFill>
+                  <a:srgbClr val="0070C0"/>
+                </a:solidFill>
+                <a:latin typeface="Menlo" panose="020B0609030804020204" pitchFamily="49" charset="0"/>
+                <a:ea typeface="Menlo" panose="020B0609030804020204" pitchFamily="49" charset="0"/>
+                <a:cs typeface="Menlo" panose="020B0609030804020204" pitchFamily="49" charset="0"/>
+              </a:rPr>
+              <a:t>, </a:t>
+            </a:r>
+            <a:r>
+              <a:rPr lang="en-US" sz="1200" b="1" dirty="0" err="1">
+                <a:solidFill>
+                  <a:srgbClr val="0070C0"/>
+                </a:solidFill>
+                <a:latin typeface="Menlo" panose="020B0609030804020204" pitchFamily="49" charset="0"/>
+                <a:ea typeface="Menlo" panose="020B0609030804020204" pitchFamily="49" charset="0"/>
+                <a:cs typeface="Menlo" panose="020B0609030804020204" pitchFamily="49" charset="0"/>
+              </a:rPr>
+              <a:t>xxxo</a:t>
+            </a:r>
+            <a:r>
+              <a:rPr lang="en-US" sz="1200" b="1" dirty="0">
+                <a:solidFill>
+                  <a:srgbClr val="0070C0"/>
+                </a:solidFill>
+                <a:latin typeface="Menlo" panose="020B0609030804020204" pitchFamily="49" charset="0"/>
+                <a:ea typeface="Menlo" panose="020B0609030804020204" pitchFamily="49" charset="0"/>
+                <a:cs typeface="Menlo" panose="020B0609030804020204" pitchFamily="49" charset="0"/>
+              </a:rPr>
+              <a:t>                4 × 4 = 16</a:t>
+            </a:r>
+          </a:p>
+          <a:p>
+            <a:r>
+              <a:rPr lang="en-US" sz="1200" b="1" dirty="0">
+                <a:solidFill>
+                  <a:srgbClr val="0070C0"/>
+                </a:solidFill>
+                <a:latin typeface="Menlo" panose="020B0609030804020204" pitchFamily="49" charset="0"/>
+                <a:ea typeface="Menlo" panose="020B0609030804020204" pitchFamily="49" charset="0"/>
+                <a:cs typeface="Menlo" panose="020B0609030804020204" pitchFamily="49" charset="0"/>
+              </a:rPr>
+              <a:t>  4         </a:t>
+            </a:r>
+            <a:r>
+              <a:rPr lang="en-US" sz="1200" b="1" dirty="0" err="1">
+                <a:solidFill>
+                  <a:srgbClr val="0070C0"/>
+                </a:solidFill>
+                <a:latin typeface="Menlo" panose="020B0609030804020204" pitchFamily="49" charset="0"/>
+                <a:ea typeface="Menlo" panose="020B0609030804020204" pitchFamily="49" charset="0"/>
+                <a:cs typeface="Menlo" panose="020B0609030804020204" pitchFamily="49" charset="0"/>
+              </a:rPr>
+              <a:t>xxxx</a:t>
+            </a:r>
+            <a:r>
+              <a:rPr lang="en-US" sz="1200" b="1" dirty="0">
+                <a:solidFill>
+                  <a:srgbClr val="0070C0"/>
+                </a:solidFill>
+                <a:latin typeface="Menlo" panose="020B0609030804020204" pitchFamily="49" charset="0"/>
+                <a:ea typeface="Menlo" panose="020B0609030804020204" pitchFamily="49" charset="0"/>
+                <a:cs typeface="Menlo" panose="020B0609030804020204" pitchFamily="49" charset="0"/>
+              </a:rPr>
+              <a:t>                                  1 × 1 = 1</a:t>
+            </a:r>
+          </a:p>
+          <a:p>
+            <a:r>
+              <a:rPr lang="en-US" sz="1200" b="1" dirty="0">
+                <a:solidFill>
+                  <a:srgbClr val="0070C0"/>
+                </a:solidFill>
+                <a:latin typeface="Menlo" panose="020B0609030804020204" pitchFamily="49" charset="0"/>
+                <a:ea typeface="Menlo" panose="020B0609030804020204" pitchFamily="49" charset="0"/>
+                <a:cs typeface="Menlo" panose="020B0609030804020204" pitchFamily="49" charset="0"/>
+              </a:rPr>
+              <a:t>------------------------------------------------------------</a:t>
+            </a:r>
+          </a:p>
+          <a:p>
+            <a:r>
+              <a:rPr lang="en-US" sz="1200" b="1" dirty="0">
+                <a:solidFill>
+                  <a:srgbClr val="0070C0"/>
+                </a:solidFill>
+                <a:latin typeface="Menlo" panose="020B0609030804020204" pitchFamily="49" charset="0"/>
+                <a:ea typeface="Menlo" panose="020B0609030804020204" pitchFamily="49" charset="0"/>
+                <a:cs typeface="Menlo" panose="020B0609030804020204" pitchFamily="49" charset="0"/>
+              </a:rPr>
+              <a:t>Total                                                     70</a:t>
+            </a:r>
+          </a:p>
+          <a:p>
+            <a:endParaRPr lang="en-US" sz="1200" b="1" dirty="0">
+              <a:solidFill>
+                <a:srgbClr val="0070C0"/>
+              </a:solidFill>
+              <a:latin typeface="Menlo" panose="020B0609030804020204" pitchFamily="49" charset="0"/>
+              <a:ea typeface="Menlo" panose="020B0609030804020204" pitchFamily="49" charset="0"/>
+              <a:cs typeface="Menlo" panose="020B0609030804020204" pitchFamily="49" charset="0"/>
+            </a:endParaRPr>
           </a:p>
         </p:txBody>
       </p:sp>

--- a/statistics_08_F_ANOVA.pptx
+++ b/statistics_08_F_ANOVA.pptx
@@ -5,13 +5,14 @@
     <p:sldMasterId id="2147483659" r:id="rId1"/>
   </p:sldMasterIdLst>
   <p:notesMasterIdLst>
-    <p:notesMasterId r:id="rId6"/>
+    <p:notesMasterId r:id="rId7"/>
   </p:notesMasterIdLst>
   <p:sldIdLst>
     <p:sldId id="278" r:id="rId2"/>
     <p:sldId id="279" r:id="rId3"/>
-    <p:sldId id="298" r:id="rId4"/>
-    <p:sldId id="297" r:id="rId5"/>
+    <p:sldId id="299" r:id="rId4"/>
+    <p:sldId id="298" r:id="rId5"/>
+    <p:sldId id="297" r:id="rId6"/>
   </p:sldIdLst>
   <p:sldSz cx="12192000" cy="6858000"/>
   <p:notesSz cx="6858000" cy="9144000"/>
@@ -13212,14 +13213,7 @@
             </a:pPr>
             <a:r>
               <a:rPr lang="en-US" dirty="0"/>
-              <a:t>right-skewed distribution used most commonly in Analysis of Variance.</a:t>
-            </a:r>
-            <a:br>
-              <a:rPr lang="en-US" dirty="0"/>
-            </a:br>
-            <a:r>
-              <a:rPr lang="en-US" dirty="0"/>
-              <a:t>( </a:t>
+              <a:t>right-skewed distribution used most commonly in ANOVA (Analysis of Variance). - ( </a:t>
             </a:r>
             <a:r>
               <a:rPr lang="en-US" dirty="0">
@@ -13457,8 +13451,8 @@
         </p:nvSpPr>
         <p:spPr>
           <a:xfrm>
-            <a:off x="219456" y="4279392"/>
-            <a:ext cx="5961888" cy="1631216"/>
+            <a:off x="294694" y="4384072"/>
+            <a:ext cx="5961888" cy="1384995"/>
           </a:xfrm>
           <a:prstGeom prst="rect">
             <a:avLst/>
@@ -13473,53 +13467,47 @@
           <a:p>
             <a:r>
               <a:rPr lang="en-US" dirty="0"/>
-              <a:t>A random variate of the F-distribution with parameters d1, d2 arises as </a:t>
-            </a:r>
+              <a:t>A random variate of the F-distribution</a:t>
+            </a:r>
+          </a:p>
+          <a:p>
+            <a:endParaRPr lang="en-US" dirty="0"/>
           </a:p>
           <a:p>
             <a:r>
               <a:rPr lang="en-US" dirty="0"/>
-              <a:t>the ratio of two appropriately scaled chi-squared variates:</a:t>
-            </a:r>
-          </a:p>
-          <a:p>
-            <a:endParaRPr lang="en-US" dirty="0"/>
-          </a:p>
-          <a:p>
-            <a:r>
-              <a:rPr lang="en-US" sz="1600" dirty="0"/>
               <a:t>                 X = (U</a:t>
             </a:r>
             <a:r>
-              <a:rPr lang="en-US" sz="1600" baseline="-25000" dirty="0"/>
+              <a:rPr lang="en-US" baseline="-25000" dirty="0"/>
               <a:t>1</a:t>
             </a:r>
             <a:r>
-              <a:rPr lang="en-US" sz="1600" dirty="0"/>
+              <a:rPr lang="en-US" dirty="0"/>
               <a:t>/d</a:t>
             </a:r>
             <a:r>
-              <a:rPr lang="en-US" sz="1600" baseline="-25000" dirty="0"/>
+              <a:rPr lang="en-US" baseline="-25000" dirty="0"/>
               <a:t>1</a:t>
             </a:r>
             <a:r>
-              <a:rPr lang="en-US" sz="1600" dirty="0"/>
+              <a:rPr lang="en-US" dirty="0"/>
               <a:t>) / (U</a:t>
             </a:r>
             <a:r>
-              <a:rPr lang="en-US" sz="1600" baseline="-25000" dirty="0"/>
+              <a:rPr lang="en-US" baseline="-25000" dirty="0"/>
               <a:t>2</a:t>
             </a:r>
             <a:r>
-              <a:rPr lang="en-US" sz="1600" dirty="0"/>
+              <a:rPr lang="en-US" dirty="0"/>
               <a:t>/d</a:t>
             </a:r>
             <a:r>
-              <a:rPr lang="en-US" sz="1600" baseline="-25000" dirty="0"/>
+              <a:rPr lang="en-US" baseline="-25000" dirty="0"/>
               <a:t>2</a:t>
             </a:r>
             <a:r>
-              <a:rPr lang="en-US" sz="1600" dirty="0"/>
+              <a:rPr lang="en-US" dirty="0"/>
               <a:t>)</a:t>
             </a:r>
           </a:p>
@@ -13586,8 +13574,8 @@
         </p:nvSpPr>
         <p:spPr>
           <a:xfrm>
-            <a:off x="6864096" y="4279392"/>
-            <a:ext cx="4864608" cy="1600438"/>
+            <a:off x="6983018" y="3995928"/>
+            <a:ext cx="4864608" cy="2246769"/>
           </a:xfrm>
           <a:prstGeom prst="rect">
             <a:avLst/>
@@ -13612,13 +13600,30 @@
           <a:p>
             <a:r>
               <a:rPr lang="en-US" dirty="0"/>
-              <a:t>where the null hypothesis is that two independent normal variances are equal, </a:t>
-            </a:r>
-          </a:p>
-          <a:p>
-            <a:r>
+              <a:t>We have two "populations" of data.</a:t>
+            </a:r>
+            <a:br>
               <a:rPr lang="en-US" dirty="0"/>
-              <a:t>and the observed sums of some appropriately selected squares are then examined to see whether their ratio is significantly incompatible with this null hypothesis.</a:t>
+            </a:br>
+            <a:r>
+              <a:rPr lang="en-US" dirty="0"/>
+              <a:t>They both have normal distributions.</a:t>
+            </a:r>
+            <a:br>
+              <a:rPr lang="en-US" dirty="0"/>
+            </a:br>
+            <a:r>
+              <a:rPr lang="en-US" dirty="0"/>
+              <a:t>Our Null hypothesis is that two independent normal variances are equal.</a:t>
+            </a:r>
+          </a:p>
+          <a:p>
+            <a:endParaRPr lang="en-US" dirty="0"/>
+          </a:p>
+          <a:p>
+            <a:r>
+              <a:rPr lang="en-US" dirty="0"/>
+              <a:t>We observe sums of some appropriately selected squares are then examine them to see whether their ratio is significantly incompatible with this null hypothesis.</a:t>
             </a:r>
           </a:p>
         </p:txBody>
@@ -14365,6 +14370,1142 @@
           <p:cNvPr id="4" name="TextBox 3">
             <a:extLst>
               <a:ext uri="{FF2B5EF4-FFF2-40B4-BE49-F238E27FC236}">
+                <a16:creationId xmlns:a16="http://schemas.microsoft.com/office/drawing/2014/main" id="{766FBFBE-7F75-0745-9981-A1DA54B77EE9}"/>
+              </a:ext>
+            </a:extLst>
+          </p:cNvPr>
+          <p:cNvSpPr txBox="1"/>
+          <p:nvPr/>
+        </p:nvSpPr>
+        <p:spPr>
+          <a:xfrm>
+            <a:off x="1048512" y="963168"/>
+            <a:ext cx="5705856" cy="5678478"/>
+          </a:xfrm>
+          <a:prstGeom prst="rect">
+            <a:avLst/>
+          </a:prstGeom>
+          <a:noFill/>
+        </p:spPr>
+        <p:txBody>
+          <a:bodyPr wrap="square" rtlCol="0">
+            <a:spAutoFit/>
+          </a:bodyPr>
+          <a:lstStyle/>
+          <a:p>
+            <a:r>
+              <a:rPr lang="en-US" sz="1100" dirty="0">
+                <a:solidFill>
+                  <a:srgbClr val="0070C0"/>
+                </a:solidFill>
+                <a:latin typeface="Menlo" panose="020B0609030804020204" pitchFamily="49" charset="0"/>
+                <a:ea typeface="Menlo" panose="020B0609030804020204" pitchFamily="49" charset="0"/>
+                <a:cs typeface="Menlo" panose="020B0609030804020204" pitchFamily="49" charset="0"/>
+              </a:rPr>
+              <a:t>import </a:t>
+            </a:r>
+            <a:r>
+              <a:rPr lang="en-US" sz="1100" dirty="0" err="1">
+                <a:solidFill>
+                  <a:srgbClr val="0070C0"/>
+                </a:solidFill>
+                <a:latin typeface="Menlo" panose="020B0609030804020204" pitchFamily="49" charset="0"/>
+                <a:ea typeface="Menlo" panose="020B0609030804020204" pitchFamily="49" charset="0"/>
+                <a:cs typeface="Menlo" panose="020B0609030804020204" pitchFamily="49" charset="0"/>
+              </a:rPr>
+              <a:t>numpy</a:t>
+            </a:r>
+            <a:r>
+              <a:rPr lang="en-US" sz="1100" dirty="0">
+                <a:solidFill>
+                  <a:srgbClr val="0070C0"/>
+                </a:solidFill>
+                <a:latin typeface="Menlo" panose="020B0609030804020204" pitchFamily="49" charset="0"/>
+                <a:ea typeface="Menlo" panose="020B0609030804020204" pitchFamily="49" charset="0"/>
+                <a:cs typeface="Menlo" panose="020B0609030804020204" pitchFamily="49" charset="0"/>
+              </a:rPr>
+              <a:t> as np</a:t>
+            </a:r>
+          </a:p>
+          <a:p>
+            <a:r>
+              <a:rPr lang="en-US" sz="1100" dirty="0">
+                <a:solidFill>
+                  <a:srgbClr val="0070C0"/>
+                </a:solidFill>
+                <a:latin typeface="Menlo" panose="020B0609030804020204" pitchFamily="49" charset="0"/>
+                <a:ea typeface="Menlo" panose="020B0609030804020204" pitchFamily="49" charset="0"/>
+                <a:cs typeface="Menlo" panose="020B0609030804020204" pitchFamily="49" charset="0"/>
+              </a:rPr>
+              <a:t>from </a:t>
+            </a:r>
+            <a:r>
+              <a:rPr lang="en-US" sz="1100" dirty="0" err="1">
+                <a:solidFill>
+                  <a:srgbClr val="0070C0"/>
+                </a:solidFill>
+                <a:latin typeface="Menlo" panose="020B0609030804020204" pitchFamily="49" charset="0"/>
+                <a:ea typeface="Menlo" panose="020B0609030804020204" pitchFamily="49" charset="0"/>
+                <a:cs typeface="Menlo" panose="020B0609030804020204" pitchFamily="49" charset="0"/>
+              </a:rPr>
+              <a:t>scipy</a:t>
+            </a:r>
+            <a:r>
+              <a:rPr lang="en-US" sz="1100" dirty="0">
+                <a:solidFill>
+                  <a:srgbClr val="0070C0"/>
+                </a:solidFill>
+                <a:latin typeface="Menlo" panose="020B0609030804020204" pitchFamily="49" charset="0"/>
+                <a:ea typeface="Menlo" panose="020B0609030804020204" pitchFamily="49" charset="0"/>
+                <a:cs typeface="Menlo" panose="020B0609030804020204" pitchFamily="49" charset="0"/>
+              </a:rPr>
+              <a:t> import stats</a:t>
+            </a:r>
+          </a:p>
+          <a:p>
+            <a:endParaRPr lang="en-US" sz="1100" dirty="0">
+              <a:solidFill>
+                <a:srgbClr val="0070C0"/>
+              </a:solidFill>
+              <a:latin typeface="Menlo" panose="020B0609030804020204" pitchFamily="49" charset="0"/>
+              <a:ea typeface="Menlo" panose="020B0609030804020204" pitchFamily="49" charset="0"/>
+              <a:cs typeface="Menlo" panose="020B0609030804020204" pitchFamily="49" charset="0"/>
+            </a:endParaRPr>
+          </a:p>
+          <a:p>
+            <a:r>
+              <a:rPr lang="en-US" sz="1100" dirty="0">
+                <a:solidFill>
+                  <a:srgbClr val="0070C0"/>
+                </a:solidFill>
+                <a:latin typeface="Menlo" panose="020B0609030804020204" pitchFamily="49" charset="0"/>
+                <a:ea typeface="Menlo" panose="020B0609030804020204" pitchFamily="49" charset="0"/>
+                <a:cs typeface="Menlo" panose="020B0609030804020204" pitchFamily="49" charset="0"/>
+              </a:rPr>
+              <a:t>import </a:t>
+            </a:r>
+            <a:r>
+              <a:rPr lang="en-US" sz="1100" dirty="0" err="1">
+                <a:solidFill>
+                  <a:srgbClr val="0070C0"/>
+                </a:solidFill>
+                <a:latin typeface="Menlo" panose="020B0609030804020204" pitchFamily="49" charset="0"/>
+                <a:ea typeface="Menlo" panose="020B0609030804020204" pitchFamily="49" charset="0"/>
+                <a:cs typeface="Menlo" panose="020B0609030804020204" pitchFamily="49" charset="0"/>
+              </a:rPr>
+              <a:t>matplotlib.pyplot</a:t>
+            </a:r>
+            <a:r>
+              <a:rPr lang="en-US" sz="1100" dirty="0">
+                <a:solidFill>
+                  <a:srgbClr val="0070C0"/>
+                </a:solidFill>
+                <a:latin typeface="Menlo" panose="020B0609030804020204" pitchFamily="49" charset="0"/>
+                <a:ea typeface="Menlo" panose="020B0609030804020204" pitchFamily="49" charset="0"/>
+                <a:cs typeface="Menlo" panose="020B0609030804020204" pitchFamily="49" charset="0"/>
+              </a:rPr>
+              <a:t> as </a:t>
+            </a:r>
+            <a:r>
+              <a:rPr lang="en-US" sz="1100" dirty="0" err="1">
+                <a:solidFill>
+                  <a:srgbClr val="0070C0"/>
+                </a:solidFill>
+                <a:latin typeface="Menlo" panose="020B0609030804020204" pitchFamily="49" charset="0"/>
+                <a:ea typeface="Menlo" panose="020B0609030804020204" pitchFamily="49" charset="0"/>
+                <a:cs typeface="Menlo" panose="020B0609030804020204" pitchFamily="49" charset="0"/>
+              </a:rPr>
+              <a:t>plt</a:t>
+            </a:r>
+            <a:endParaRPr lang="en-US" sz="1100" dirty="0">
+              <a:solidFill>
+                <a:srgbClr val="0070C0"/>
+              </a:solidFill>
+              <a:latin typeface="Menlo" panose="020B0609030804020204" pitchFamily="49" charset="0"/>
+              <a:ea typeface="Menlo" panose="020B0609030804020204" pitchFamily="49" charset="0"/>
+              <a:cs typeface="Menlo" panose="020B0609030804020204" pitchFamily="49" charset="0"/>
+            </a:endParaRPr>
+          </a:p>
+          <a:p>
+            <a:r>
+              <a:rPr lang="en-US" sz="1100" dirty="0">
+                <a:solidFill>
+                  <a:srgbClr val="0070C0"/>
+                </a:solidFill>
+                <a:latin typeface="Menlo" panose="020B0609030804020204" pitchFamily="49" charset="0"/>
+                <a:ea typeface="Menlo" panose="020B0609030804020204" pitchFamily="49" charset="0"/>
+                <a:cs typeface="Menlo" panose="020B0609030804020204" pitchFamily="49" charset="0"/>
+              </a:rPr>
+              <a:t>%config </a:t>
+            </a:r>
+            <a:r>
+              <a:rPr lang="en-US" sz="1100" dirty="0" err="1">
+                <a:solidFill>
+                  <a:srgbClr val="0070C0"/>
+                </a:solidFill>
+                <a:latin typeface="Menlo" panose="020B0609030804020204" pitchFamily="49" charset="0"/>
+                <a:ea typeface="Menlo" panose="020B0609030804020204" pitchFamily="49" charset="0"/>
+                <a:cs typeface="Menlo" panose="020B0609030804020204" pitchFamily="49" charset="0"/>
+              </a:rPr>
+              <a:t>InlineBackend.figure_format</a:t>
+            </a:r>
+            <a:r>
+              <a:rPr lang="en-US" sz="1100" dirty="0">
+                <a:solidFill>
+                  <a:srgbClr val="0070C0"/>
+                </a:solidFill>
+                <a:latin typeface="Menlo" panose="020B0609030804020204" pitchFamily="49" charset="0"/>
+                <a:ea typeface="Menlo" panose="020B0609030804020204" pitchFamily="49" charset="0"/>
+                <a:cs typeface="Menlo" panose="020B0609030804020204" pitchFamily="49" charset="0"/>
+              </a:rPr>
+              <a:t> = 'retina'</a:t>
+            </a:r>
+          </a:p>
+          <a:p>
+            <a:endParaRPr lang="en-US" sz="1100" dirty="0">
+              <a:solidFill>
+                <a:srgbClr val="0070C0"/>
+              </a:solidFill>
+              <a:latin typeface="Menlo" panose="020B0609030804020204" pitchFamily="49" charset="0"/>
+              <a:ea typeface="Menlo" panose="020B0609030804020204" pitchFamily="49" charset="0"/>
+              <a:cs typeface="Menlo" panose="020B0609030804020204" pitchFamily="49" charset="0"/>
+            </a:endParaRPr>
+          </a:p>
+          <a:p>
+            <a:r>
+              <a:rPr lang="en-US" sz="1100" dirty="0">
+                <a:solidFill>
+                  <a:srgbClr val="0070C0"/>
+                </a:solidFill>
+                <a:latin typeface="Menlo" panose="020B0609030804020204" pitchFamily="49" charset="0"/>
+                <a:ea typeface="Menlo" panose="020B0609030804020204" pitchFamily="49" charset="0"/>
+                <a:cs typeface="Menlo" panose="020B0609030804020204" pitchFamily="49" charset="0"/>
+              </a:rPr>
+              <a:t># Example: two-tailed test</a:t>
+            </a:r>
+          </a:p>
+          <a:p>
+            <a:endParaRPr lang="en-US" sz="1100" dirty="0">
+              <a:solidFill>
+                <a:srgbClr val="0070C0"/>
+              </a:solidFill>
+              <a:latin typeface="Menlo" panose="020B0609030804020204" pitchFamily="49" charset="0"/>
+              <a:ea typeface="Menlo" panose="020B0609030804020204" pitchFamily="49" charset="0"/>
+              <a:cs typeface="Menlo" panose="020B0609030804020204" pitchFamily="49" charset="0"/>
+            </a:endParaRPr>
+          </a:p>
+          <a:p>
+            <a:r>
+              <a:rPr lang="en-US" sz="1100" dirty="0">
+                <a:solidFill>
+                  <a:srgbClr val="0070C0"/>
+                </a:solidFill>
+                <a:latin typeface="Menlo" panose="020B0609030804020204" pitchFamily="49" charset="0"/>
+                <a:ea typeface="Menlo" panose="020B0609030804020204" pitchFamily="49" charset="0"/>
+                <a:cs typeface="Menlo" panose="020B0609030804020204" pitchFamily="49" charset="0"/>
+              </a:rPr>
+              <a:t>alpha = 0.05</a:t>
+            </a:r>
+          </a:p>
+          <a:p>
+            <a:endParaRPr lang="en-US" sz="1100" dirty="0">
+              <a:solidFill>
+                <a:srgbClr val="0070C0"/>
+              </a:solidFill>
+              <a:latin typeface="Menlo" panose="020B0609030804020204" pitchFamily="49" charset="0"/>
+              <a:ea typeface="Menlo" panose="020B0609030804020204" pitchFamily="49" charset="0"/>
+              <a:cs typeface="Menlo" panose="020B0609030804020204" pitchFamily="49" charset="0"/>
+            </a:endParaRPr>
+          </a:p>
+          <a:p>
+            <a:r>
+              <a:rPr lang="en-US" sz="1100" dirty="0">
+                <a:solidFill>
+                  <a:srgbClr val="0070C0"/>
+                </a:solidFill>
+                <a:latin typeface="Menlo" panose="020B0609030804020204" pitchFamily="49" charset="0"/>
+                <a:ea typeface="Menlo" panose="020B0609030804020204" pitchFamily="49" charset="0"/>
+                <a:cs typeface="Menlo" panose="020B0609030804020204" pitchFamily="49" charset="0"/>
+              </a:rPr>
+              <a:t>a = [1, 2,  1, 2, 1, 2,  1, 2,  1, 2]</a:t>
+            </a:r>
+          </a:p>
+          <a:p>
+            <a:r>
+              <a:rPr lang="en-US" sz="1100" dirty="0">
+                <a:solidFill>
+                  <a:srgbClr val="0070C0"/>
+                </a:solidFill>
+                <a:latin typeface="Menlo" panose="020B0609030804020204" pitchFamily="49" charset="0"/>
+                <a:ea typeface="Menlo" panose="020B0609030804020204" pitchFamily="49" charset="0"/>
+                <a:cs typeface="Menlo" panose="020B0609030804020204" pitchFamily="49" charset="0"/>
+              </a:rPr>
+              <a:t>b = [1, 3, -1, 2, 1, 5, -1, 6, -1, 2]</a:t>
+            </a:r>
+          </a:p>
+          <a:p>
+            <a:endParaRPr lang="en-US" sz="1100" dirty="0">
+              <a:solidFill>
+                <a:srgbClr val="0070C0"/>
+              </a:solidFill>
+              <a:latin typeface="Menlo" panose="020B0609030804020204" pitchFamily="49" charset="0"/>
+              <a:ea typeface="Menlo" panose="020B0609030804020204" pitchFamily="49" charset="0"/>
+              <a:cs typeface="Menlo" panose="020B0609030804020204" pitchFamily="49" charset="0"/>
+            </a:endParaRPr>
+          </a:p>
+          <a:p>
+            <a:r>
+              <a:rPr lang="en-US" sz="1100" dirty="0" err="1">
+                <a:solidFill>
+                  <a:srgbClr val="0070C0"/>
+                </a:solidFill>
+                <a:latin typeface="Menlo" panose="020B0609030804020204" pitchFamily="49" charset="0"/>
+                <a:ea typeface="Menlo" panose="020B0609030804020204" pitchFamily="49" charset="0"/>
+                <a:cs typeface="Menlo" panose="020B0609030804020204" pitchFamily="49" charset="0"/>
+              </a:rPr>
+              <a:t>var_a</a:t>
+            </a:r>
+            <a:r>
+              <a:rPr lang="en-US" sz="1100" dirty="0">
+                <a:solidFill>
+                  <a:srgbClr val="0070C0"/>
+                </a:solidFill>
+                <a:latin typeface="Menlo" panose="020B0609030804020204" pitchFamily="49" charset="0"/>
+                <a:ea typeface="Menlo" panose="020B0609030804020204" pitchFamily="49" charset="0"/>
+                <a:cs typeface="Menlo" panose="020B0609030804020204" pitchFamily="49" charset="0"/>
+              </a:rPr>
+              <a:t> = </a:t>
+            </a:r>
+            <a:r>
+              <a:rPr lang="en-US" sz="1100" dirty="0" err="1">
+                <a:solidFill>
+                  <a:srgbClr val="0070C0"/>
+                </a:solidFill>
+                <a:latin typeface="Menlo" panose="020B0609030804020204" pitchFamily="49" charset="0"/>
+                <a:ea typeface="Menlo" panose="020B0609030804020204" pitchFamily="49" charset="0"/>
+                <a:cs typeface="Menlo" panose="020B0609030804020204" pitchFamily="49" charset="0"/>
+              </a:rPr>
+              <a:t>np.var</a:t>
+            </a:r>
+            <a:r>
+              <a:rPr lang="en-US" sz="1100" dirty="0">
+                <a:solidFill>
+                  <a:srgbClr val="0070C0"/>
+                </a:solidFill>
+                <a:latin typeface="Menlo" panose="020B0609030804020204" pitchFamily="49" charset="0"/>
+                <a:ea typeface="Menlo" panose="020B0609030804020204" pitchFamily="49" charset="0"/>
+                <a:cs typeface="Menlo" panose="020B0609030804020204" pitchFamily="49" charset="0"/>
+              </a:rPr>
+              <a:t>(a, </a:t>
+            </a:r>
+            <a:r>
+              <a:rPr lang="en-US" sz="1100" dirty="0" err="1">
+                <a:solidFill>
+                  <a:srgbClr val="0070C0"/>
+                </a:solidFill>
+                <a:latin typeface="Menlo" panose="020B0609030804020204" pitchFamily="49" charset="0"/>
+                <a:ea typeface="Menlo" panose="020B0609030804020204" pitchFamily="49" charset="0"/>
+                <a:cs typeface="Menlo" panose="020B0609030804020204" pitchFamily="49" charset="0"/>
+              </a:rPr>
+              <a:t>ddof</a:t>
+            </a:r>
+            <a:r>
+              <a:rPr lang="en-US" sz="1100" dirty="0">
+                <a:solidFill>
+                  <a:srgbClr val="0070C0"/>
+                </a:solidFill>
+                <a:latin typeface="Menlo" panose="020B0609030804020204" pitchFamily="49" charset="0"/>
+                <a:ea typeface="Menlo" panose="020B0609030804020204" pitchFamily="49" charset="0"/>
+                <a:cs typeface="Menlo" panose="020B0609030804020204" pitchFamily="49" charset="0"/>
+              </a:rPr>
+              <a:t>=1)</a:t>
+            </a:r>
+          </a:p>
+          <a:p>
+            <a:r>
+              <a:rPr lang="en-US" sz="1100" dirty="0" err="1">
+                <a:solidFill>
+                  <a:srgbClr val="0070C0"/>
+                </a:solidFill>
+                <a:latin typeface="Menlo" panose="020B0609030804020204" pitchFamily="49" charset="0"/>
+                <a:ea typeface="Menlo" panose="020B0609030804020204" pitchFamily="49" charset="0"/>
+                <a:cs typeface="Menlo" panose="020B0609030804020204" pitchFamily="49" charset="0"/>
+              </a:rPr>
+              <a:t>var_b</a:t>
+            </a:r>
+            <a:r>
+              <a:rPr lang="en-US" sz="1100" dirty="0">
+                <a:solidFill>
+                  <a:srgbClr val="0070C0"/>
+                </a:solidFill>
+                <a:latin typeface="Menlo" panose="020B0609030804020204" pitchFamily="49" charset="0"/>
+                <a:ea typeface="Menlo" panose="020B0609030804020204" pitchFamily="49" charset="0"/>
+                <a:cs typeface="Menlo" panose="020B0609030804020204" pitchFamily="49" charset="0"/>
+              </a:rPr>
+              <a:t> = </a:t>
+            </a:r>
+            <a:r>
+              <a:rPr lang="en-US" sz="1100" dirty="0" err="1">
+                <a:solidFill>
+                  <a:srgbClr val="0070C0"/>
+                </a:solidFill>
+                <a:latin typeface="Menlo" panose="020B0609030804020204" pitchFamily="49" charset="0"/>
+                <a:ea typeface="Menlo" panose="020B0609030804020204" pitchFamily="49" charset="0"/>
+                <a:cs typeface="Menlo" panose="020B0609030804020204" pitchFamily="49" charset="0"/>
+              </a:rPr>
+              <a:t>np.var</a:t>
+            </a:r>
+            <a:r>
+              <a:rPr lang="en-US" sz="1100" dirty="0">
+                <a:solidFill>
+                  <a:srgbClr val="0070C0"/>
+                </a:solidFill>
+                <a:latin typeface="Menlo" panose="020B0609030804020204" pitchFamily="49" charset="0"/>
+                <a:ea typeface="Menlo" panose="020B0609030804020204" pitchFamily="49" charset="0"/>
+                <a:cs typeface="Menlo" panose="020B0609030804020204" pitchFamily="49" charset="0"/>
+              </a:rPr>
+              <a:t>(b, </a:t>
+            </a:r>
+            <a:r>
+              <a:rPr lang="en-US" sz="1100" dirty="0" err="1">
+                <a:solidFill>
+                  <a:srgbClr val="0070C0"/>
+                </a:solidFill>
+                <a:latin typeface="Menlo" panose="020B0609030804020204" pitchFamily="49" charset="0"/>
+                <a:ea typeface="Menlo" panose="020B0609030804020204" pitchFamily="49" charset="0"/>
+                <a:cs typeface="Menlo" panose="020B0609030804020204" pitchFamily="49" charset="0"/>
+              </a:rPr>
+              <a:t>ddof</a:t>
+            </a:r>
+            <a:r>
+              <a:rPr lang="en-US" sz="1100" dirty="0">
+                <a:solidFill>
+                  <a:srgbClr val="0070C0"/>
+                </a:solidFill>
+                <a:latin typeface="Menlo" panose="020B0609030804020204" pitchFamily="49" charset="0"/>
+                <a:ea typeface="Menlo" panose="020B0609030804020204" pitchFamily="49" charset="0"/>
+                <a:cs typeface="Menlo" panose="020B0609030804020204" pitchFamily="49" charset="0"/>
+              </a:rPr>
+              <a:t>=1)</a:t>
+            </a:r>
+          </a:p>
+          <a:p>
+            <a:r>
+              <a:rPr lang="en-US" sz="1100" dirty="0">
+                <a:solidFill>
+                  <a:srgbClr val="0070C0"/>
+                </a:solidFill>
+                <a:latin typeface="Menlo" panose="020B0609030804020204" pitchFamily="49" charset="0"/>
+                <a:ea typeface="Menlo" panose="020B0609030804020204" pitchFamily="49" charset="0"/>
+                <a:cs typeface="Menlo" panose="020B0609030804020204" pitchFamily="49" charset="0"/>
+              </a:rPr>
+              <a:t>print(</a:t>
+            </a:r>
+            <a:r>
+              <a:rPr lang="en-US" sz="1100" dirty="0" err="1">
+                <a:solidFill>
+                  <a:srgbClr val="0070C0"/>
+                </a:solidFill>
+                <a:latin typeface="Menlo" panose="020B0609030804020204" pitchFamily="49" charset="0"/>
+                <a:ea typeface="Menlo" panose="020B0609030804020204" pitchFamily="49" charset="0"/>
+                <a:cs typeface="Menlo" panose="020B0609030804020204" pitchFamily="49" charset="0"/>
+              </a:rPr>
+              <a:t>f"Variance</a:t>
+            </a:r>
+            <a:r>
+              <a:rPr lang="en-US" sz="1100" dirty="0">
+                <a:solidFill>
+                  <a:srgbClr val="0070C0"/>
+                </a:solidFill>
+                <a:latin typeface="Menlo" panose="020B0609030804020204" pitchFamily="49" charset="0"/>
+                <a:ea typeface="Menlo" panose="020B0609030804020204" pitchFamily="49" charset="0"/>
+                <a:cs typeface="Menlo" panose="020B0609030804020204" pitchFamily="49" charset="0"/>
+              </a:rPr>
+              <a:t> a={var_a:.3f}, Variance b={var_b:.3f}")</a:t>
+            </a:r>
+          </a:p>
+          <a:p>
+            <a:endParaRPr lang="en-US" sz="1100" dirty="0">
+              <a:solidFill>
+                <a:srgbClr val="0070C0"/>
+              </a:solidFill>
+              <a:latin typeface="Menlo" panose="020B0609030804020204" pitchFamily="49" charset="0"/>
+              <a:ea typeface="Menlo" panose="020B0609030804020204" pitchFamily="49" charset="0"/>
+              <a:cs typeface="Menlo" panose="020B0609030804020204" pitchFamily="49" charset="0"/>
+            </a:endParaRPr>
+          </a:p>
+          <a:p>
+            <a:r>
+              <a:rPr lang="en-US" sz="1100" dirty="0" err="1">
+                <a:solidFill>
+                  <a:srgbClr val="0070C0"/>
+                </a:solidFill>
+                <a:latin typeface="Menlo" panose="020B0609030804020204" pitchFamily="49" charset="0"/>
+                <a:ea typeface="Menlo" panose="020B0609030804020204" pitchFamily="49" charset="0"/>
+                <a:cs typeface="Menlo" panose="020B0609030804020204" pitchFamily="49" charset="0"/>
+              </a:rPr>
+              <a:t>f_stat</a:t>
+            </a:r>
+            <a:r>
+              <a:rPr lang="en-US" sz="1100" dirty="0">
+                <a:solidFill>
+                  <a:srgbClr val="0070C0"/>
+                </a:solidFill>
+                <a:latin typeface="Menlo" panose="020B0609030804020204" pitchFamily="49" charset="0"/>
+                <a:ea typeface="Menlo" panose="020B0609030804020204" pitchFamily="49" charset="0"/>
+                <a:cs typeface="Menlo" panose="020B0609030804020204" pitchFamily="49" charset="0"/>
+              </a:rPr>
+              <a:t> = </a:t>
+            </a:r>
+            <a:r>
+              <a:rPr lang="en-US" sz="1100" dirty="0" err="1">
+                <a:solidFill>
+                  <a:srgbClr val="0070C0"/>
+                </a:solidFill>
+                <a:latin typeface="Menlo" panose="020B0609030804020204" pitchFamily="49" charset="0"/>
+                <a:ea typeface="Menlo" panose="020B0609030804020204" pitchFamily="49" charset="0"/>
+                <a:cs typeface="Menlo" panose="020B0609030804020204" pitchFamily="49" charset="0"/>
+              </a:rPr>
+              <a:t>var_a</a:t>
+            </a:r>
+            <a:r>
+              <a:rPr lang="en-US" sz="1100" dirty="0">
+                <a:solidFill>
+                  <a:srgbClr val="0070C0"/>
+                </a:solidFill>
+                <a:latin typeface="Menlo" panose="020B0609030804020204" pitchFamily="49" charset="0"/>
+                <a:ea typeface="Menlo" panose="020B0609030804020204" pitchFamily="49" charset="0"/>
+                <a:cs typeface="Menlo" panose="020B0609030804020204" pitchFamily="49" charset="0"/>
+              </a:rPr>
+              <a:t>/</a:t>
+            </a:r>
+            <a:r>
+              <a:rPr lang="en-US" sz="1100" dirty="0" err="1">
+                <a:solidFill>
+                  <a:srgbClr val="0070C0"/>
+                </a:solidFill>
+                <a:latin typeface="Menlo" panose="020B0609030804020204" pitchFamily="49" charset="0"/>
+                <a:ea typeface="Menlo" panose="020B0609030804020204" pitchFamily="49" charset="0"/>
+                <a:cs typeface="Menlo" panose="020B0609030804020204" pitchFamily="49" charset="0"/>
+              </a:rPr>
+              <a:t>var_b</a:t>
+            </a:r>
+            <a:r>
+              <a:rPr lang="en-US" sz="1100" dirty="0">
+                <a:solidFill>
+                  <a:srgbClr val="0070C0"/>
+                </a:solidFill>
+                <a:latin typeface="Menlo" panose="020B0609030804020204" pitchFamily="49" charset="0"/>
+                <a:ea typeface="Menlo" panose="020B0609030804020204" pitchFamily="49" charset="0"/>
+                <a:cs typeface="Menlo" panose="020B0609030804020204" pitchFamily="49" charset="0"/>
+              </a:rPr>
+              <a:t> # because we estimate mean from data</a:t>
+            </a:r>
+          </a:p>
+          <a:p>
+            <a:endParaRPr lang="en-US" sz="1100" dirty="0">
+              <a:solidFill>
+                <a:srgbClr val="0070C0"/>
+              </a:solidFill>
+              <a:latin typeface="Menlo" panose="020B0609030804020204" pitchFamily="49" charset="0"/>
+              <a:ea typeface="Menlo" panose="020B0609030804020204" pitchFamily="49" charset="0"/>
+              <a:cs typeface="Menlo" panose="020B0609030804020204" pitchFamily="49" charset="0"/>
+            </a:endParaRPr>
+          </a:p>
+          <a:p>
+            <a:r>
+              <a:rPr lang="en-US" sz="1100" dirty="0">
+                <a:solidFill>
+                  <a:srgbClr val="0070C0"/>
+                </a:solidFill>
+                <a:latin typeface="Menlo" panose="020B0609030804020204" pitchFamily="49" charset="0"/>
+                <a:ea typeface="Menlo" panose="020B0609030804020204" pitchFamily="49" charset="0"/>
+                <a:cs typeface="Menlo" panose="020B0609030804020204" pitchFamily="49" charset="0"/>
+              </a:rPr>
+              <a:t># build an F-distribution object</a:t>
+            </a:r>
+          </a:p>
+          <a:p>
+            <a:r>
+              <a:rPr lang="en-US" sz="1100" dirty="0" err="1">
+                <a:solidFill>
+                  <a:srgbClr val="0070C0"/>
+                </a:solidFill>
+                <a:latin typeface="Menlo" panose="020B0609030804020204" pitchFamily="49" charset="0"/>
+                <a:ea typeface="Menlo" panose="020B0609030804020204" pitchFamily="49" charset="0"/>
+                <a:cs typeface="Menlo" panose="020B0609030804020204" pitchFamily="49" charset="0"/>
+              </a:rPr>
+              <a:t>f_dist</a:t>
+            </a:r>
+            <a:r>
+              <a:rPr lang="en-US" sz="1100" dirty="0">
+                <a:solidFill>
+                  <a:srgbClr val="0070C0"/>
+                </a:solidFill>
+                <a:latin typeface="Menlo" panose="020B0609030804020204" pitchFamily="49" charset="0"/>
+                <a:ea typeface="Menlo" panose="020B0609030804020204" pitchFamily="49" charset="0"/>
+                <a:cs typeface="Menlo" panose="020B0609030804020204" pitchFamily="49" charset="0"/>
+              </a:rPr>
+              <a:t> = </a:t>
+            </a:r>
+            <a:r>
+              <a:rPr lang="en-US" sz="1100" dirty="0" err="1">
+                <a:solidFill>
+                  <a:srgbClr val="0070C0"/>
+                </a:solidFill>
+                <a:latin typeface="Menlo" panose="020B0609030804020204" pitchFamily="49" charset="0"/>
+                <a:ea typeface="Menlo" panose="020B0609030804020204" pitchFamily="49" charset="0"/>
+                <a:cs typeface="Menlo" panose="020B0609030804020204" pitchFamily="49" charset="0"/>
+              </a:rPr>
+              <a:t>stats.f</a:t>
+            </a:r>
+            <a:r>
+              <a:rPr lang="en-US" sz="1100" dirty="0">
+                <a:solidFill>
+                  <a:srgbClr val="0070C0"/>
+                </a:solidFill>
+                <a:latin typeface="Menlo" panose="020B0609030804020204" pitchFamily="49" charset="0"/>
+                <a:ea typeface="Menlo" panose="020B0609030804020204" pitchFamily="49" charset="0"/>
+                <a:cs typeface="Menlo" panose="020B0609030804020204" pitchFamily="49" charset="0"/>
+              </a:rPr>
+              <a:t>(</a:t>
+            </a:r>
+            <a:r>
+              <a:rPr lang="en-US" sz="1100" dirty="0" err="1">
+                <a:solidFill>
+                  <a:srgbClr val="0070C0"/>
+                </a:solidFill>
+                <a:latin typeface="Menlo" panose="020B0609030804020204" pitchFamily="49" charset="0"/>
+                <a:ea typeface="Menlo" panose="020B0609030804020204" pitchFamily="49" charset="0"/>
+                <a:cs typeface="Menlo" panose="020B0609030804020204" pitchFamily="49" charset="0"/>
+              </a:rPr>
+              <a:t>len</a:t>
+            </a:r>
+            <a:r>
+              <a:rPr lang="en-US" sz="1100" dirty="0">
+                <a:solidFill>
+                  <a:srgbClr val="0070C0"/>
+                </a:solidFill>
+                <a:latin typeface="Menlo" panose="020B0609030804020204" pitchFamily="49" charset="0"/>
+                <a:ea typeface="Menlo" panose="020B0609030804020204" pitchFamily="49" charset="0"/>
+                <a:cs typeface="Menlo" panose="020B0609030804020204" pitchFamily="49" charset="0"/>
+              </a:rPr>
+              <a:t>(a)-1,len(b)-1) </a:t>
+            </a:r>
+          </a:p>
+          <a:p>
+            <a:endParaRPr lang="en-US" sz="1100" dirty="0">
+              <a:solidFill>
+                <a:srgbClr val="0070C0"/>
+              </a:solidFill>
+              <a:latin typeface="Menlo" panose="020B0609030804020204" pitchFamily="49" charset="0"/>
+              <a:ea typeface="Menlo" panose="020B0609030804020204" pitchFamily="49" charset="0"/>
+              <a:cs typeface="Menlo" panose="020B0609030804020204" pitchFamily="49" charset="0"/>
+            </a:endParaRPr>
+          </a:p>
+          <a:p>
+            <a:r>
+              <a:rPr lang="en-US" sz="1100" dirty="0" err="1">
+                <a:solidFill>
+                  <a:srgbClr val="0070C0"/>
+                </a:solidFill>
+                <a:latin typeface="Menlo" panose="020B0609030804020204" pitchFamily="49" charset="0"/>
+                <a:ea typeface="Menlo" panose="020B0609030804020204" pitchFamily="49" charset="0"/>
+                <a:cs typeface="Menlo" panose="020B0609030804020204" pitchFamily="49" charset="0"/>
+              </a:rPr>
+              <a:t>f_crit_val</a:t>
+            </a:r>
+            <a:r>
+              <a:rPr lang="en-US" sz="1100" dirty="0">
+                <a:solidFill>
+                  <a:srgbClr val="0070C0"/>
+                </a:solidFill>
+                <a:latin typeface="Menlo" panose="020B0609030804020204" pitchFamily="49" charset="0"/>
+                <a:ea typeface="Menlo" panose="020B0609030804020204" pitchFamily="49" charset="0"/>
+                <a:cs typeface="Menlo" panose="020B0609030804020204" pitchFamily="49" charset="0"/>
+              </a:rPr>
+              <a:t> = </a:t>
+            </a:r>
+            <a:r>
+              <a:rPr lang="en-US" sz="1100" dirty="0" err="1">
+                <a:solidFill>
+                  <a:srgbClr val="0070C0"/>
+                </a:solidFill>
+                <a:latin typeface="Menlo" panose="020B0609030804020204" pitchFamily="49" charset="0"/>
+                <a:ea typeface="Menlo" panose="020B0609030804020204" pitchFamily="49" charset="0"/>
+                <a:cs typeface="Menlo" panose="020B0609030804020204" pitchFamily="49" charset="0"/>
+              </a:rPr>
+              <a:t>f_dist.ppf</a:t>
+            </a:r>
+            <a:r>
+              <a:rPr lang="en-US" sz="1100" dirty="0">
+                <a:solidFill>
+                  <a:srgbClr val="0070C0"/>
+                </a:solidFill>
+                <a:latin typeface="Menlo" panose="020B0609030804020204" pitchFamily="49" charset="0"/>
+                <a:ea typeface="Menlo" panose="020B0609030804020204" pitchFamily="49" charset="0"/>
+                <a:cs typeface="Menlo" panose="020B0609030804020204" pitchFamily="49" charset="0"/>
+              </a:rPr>
+              <a:t>(0.95)</a:t>
+            </a:r>
+          </a:p>
+          <a:p>
+            <a:r>
+              <a:rPr lang="en-US" sz="1100" dirty="0" err="1">
+                <a:solidFill>
+                  <a:srgbClr val="0070C0"/>
+                </a:solidFill>
+                <a:latin typeface="Menlo" panose="020B0609030804020204" pitchFamily="49" charset="0"/>
+                <a:ea typeface="Menlo" panose="020B0609030804020204" pitchFamily="49" charset="0"/>
+                <a:cs typeface="Menlo" panose="020B0609030804020204" pitchFamily="49" charset="0"/>
+              </a:rPr>
+              <a:t>p_val</a:t>
+            </a:r>
+            <a:r>
+              <a:rPr lang="en-US" sz="1100" dirty="0">
+                <a:solidFill>
+                  <a:srgbClr val="0070C0"/>
+                </a:solidFill>
+                <a:latin typeface="Menlo" panose="020B0609030804020204" pitchFamily="49" charset="0"/>
+                <a:ea typeface="Menlo" panose="020B0609030804020204" pitchFamily="49" charset="0"/>
+                <a:cs typeface="Menlo" panose="020B0609030804020204" pitchFamily="49" charset="0"/>
+              </a:rPr>
+              <a:t> = 2*min(</a:t>
+            </a:r>
+            <a:r>
+              <a:rPr lang="en-US" sz="1100" dirty="0" err="1">
+                <a:solidFill>
+                  <a:srgbClr val="0070C0"/>
+                </a:solidFill>
+                <a:latin typeface="Menlo" panose="020B0609030804020204" pitchFamily="49" charset="0"/>
+                <a:ea typeface="Menlo" panose="020B0609030804020204" pitchFamily="49" charset="0"/>
+                <a:cs typeface="Menlo" panose="020B0609030804020204" pitchFamily="49" charset="0"/>
+              </a:rPr>
+              <a:t>f_dist.cdf</a:t>
+            </a:r>
+            <a:r>
+              <a:rPr lang="en-US" sz="1100" dirty="0">
+                <a:solidFill>
+                  <a:srgbClr val="0070C0"/>
+                </a:solidFill>
+                <a:latin typeface="Menlo" panose="020B0609030804020204" pitchFamily="49" charset="0"/>
+                <a:ea typeface="Menlo" panose="020B0609030804020204" pitchFamily="49" charset="0"/>
+                <a:cs typeface="Menlo" panose="020B0609030804020204" pitchFamily="49" charset="0"/>
+              </a:rPr>
+              <a:t>(</a:t>
+            </a:r>
+            <a:r>
+              <a:rPr lang="en-US" sz="1100" dirty="0" err="1">
+                <a:solidFill>
+                  <a:srgbClr val="0070C0"/>
+                </a:solidFill>
+                <a:latin typeface="Menlo" panose="020B0609030804020204" pitchFamily="49" charset="0"/>
+                <a:ea typeface="Menlo" panose="020B0609030804020204" pitchFamily="49" charset="0"/>
+                <a:cs typeface="Menlo" panose="020B0609030804020204" pitchFamily="49" charset="0"/>
+              </a:rPr>
+              <a:t>f_crit_val</a:t>
+            </a:r>
+            <a:r>
+              <a:rPr lang="en-US" sz="1100" dirty="0">
+                <a:solidFill>
+                  <a:srgbClr val="0070C0"/>
+                </a:solidFill>
+                <a:latin typeface="Menlo" panose="020B0609030804020204" pitchFamily="49" charset="0"/>
+                <a:ea typeface="Menlo" panose="020B0609030804020204" pitchFamily="49" charset="0"/>
+                <a:cs typeface="Menlo" panose="020B0609030804020204" pitchFamily="49" charset="0"/>
+              </a:rPr>
+              <a:t>), 1-f_dist.cdf(</a:t>
+            </a:r>
+            <a:r>
+              <a:rPr lang="en-US" sz="1100" dirty="0" err="1">
+                <a:solidFill>
+                  <a:srgbClr val="0070C0"/>
+                </a:solidFill>
+                <a:latin typeface="Menlo" panose="020B0609030804020204" pitchFamily="49" charset="0"/>
+                <a:ea typeface="Menlo" panose="020B0609030804020204" pitchFamily="49" charset="0"/>
+                <a:cs typeface="Menlo" panose="020B0609030804020204" pitchFamily="49" charset="0"/>
+              </a:rPr>
+              <a:t>f_crit_val</a:t>
+            </a:r>
+            <a:r>
+              <a:rPr lang="en-US" sz="1100" dirty="0">
+                <a:solidFill>
+                  <a:srgbClr val="0070C0"/>
+                </a:solidFill>
+                <a:latin typeface="Menlo" panose="020B0609030804020204" pitchFamily="49" charset="0"/>
+                <a:ea typeface="Menlo" panose="020B0609030804020204" pitchFamily="49" charset="0"/>
+                <a:cs typeface="Menlo" panose="020B0609030804020204" pitchFamily="49" charset="0"/>
+              </a:rPr>
+              <a:t>))</a:t>
+            </a:r>
+          </a:p>
+          <a:p>
+            <a:endParaRPr lang="en-US" sz="1100" dirty="0">
+              <a:solidFill>
+                <a:srgbClr val="0070C0"/>
+              </a:solidFill>
+              <a:latin typeface="Menlo" panose="020B0609030804020204" pitchFamily="49" charset="0"/>
+              <a:ea typeface="Menlo" panose="020B0609030804020204" pitchFamily="49" charset="0"/>
+              <a:cs typeface="Menlo" panose="020B0609030804020204" pitchFamily="49" charset="0"/>
+            </a:endParaRPr>
+          </a:p>
+          <a:p>
+            <a:r>
+              <a:rPr lang="en-US" sz="1100" dirty="0">
+                <a:solidFill>
+                  <a:srgbClr val="0070C0"/>
+                </a:solidFill>
+                <a:latin typeface="Menlo" panose="020B0609030804020204" pitchFamily="49" charset="0"/>
+                <a:ea typeface="Menlo" panose="020B0609030804020204" pitchFamily="49" charset="0"/>
+                <a:cs typeface="Menlo" panose="020B0609030804020204" pitchFamily="49" charset="0"/>
+              </a:rPr>
+              <a:t>print(</a:t>
+            </a:r>
+            <a:r>
+              <a:rPr lang="en-US" sz="1100" dirty="0" err="1">
+                <a:solidFill>
+                  <a:srgbClr val="0070C0"/>
+                </a:solidFill>
+                <a:latin typeface="Menlo" panose="020B0609030804020204" pitchFamily="49" charset="0"/>
+                <a:ea typeface="Menlo" panose="020B0609030804020204" pitchFamily="49" charset="0"/>
+                <a:cs typeface="Menlo" panose="020B0609030804020204" pitchFamily="49" charset="0"/>
+              </a:rPr>
+              <a:t>f"f_crit_val</a:t>
+            </a:r>
+            <a:r>
+              <a:rPr lang="en-US" sz="1100" dirty="0">
+                <a:solidFill>
+                  <a:srgbClr val="0070C0"/>
+                </a:solidFill>
+                <a:latin typeface="Menlo" panose="020B0609030804020204" pitchFamily="49" charset="0"/>
+                <a:ea typeface="Menlo" panose="020B0609030804020204" pitchFamily="49" charset="0"/>
+                <a:cs typeface="Menlo" panose="020B0609030804020204" pitchFamily="49" charset="0"/>
+              </a:rPr>
+              <a:t> = {f_crit_val:.4f}")</a:t>
+            </a:r>
+          </a:p>
+          <a:p>
+            <a:r>
+              <a:rPr lang="en-US" sz="1100" dirty="0">
+                <a:solidFill>
+                  <a:srgbClr val="0070C0"/>
+                </a:solidFill>
+                <a:latin typeface="Menlo" panose="020B0609030804020204" pitchFamily="49" charset="0"/>
+                <a:ea typeface="Menlo" panose="020B0609030804020204" pitchFamily="49" charset="0"/>
+                <a:cs typeface="Menlo" panose="020B0609030804020204" pitchFamily="49" charset="0"/>
+              </a:rPr>
+              <a:t>print(</a:t>
+            </a:r>
+            <a:r>
+              <a:rPr lang="en-US" sz="1100" dirty="0" err="1">
+                <a:solidFill>
+                  <a:srgbClr val="0070C0"/>
+                </a:solidFill>
+                <a:latin typeface="Menlo" panose="020B0609030804020204" pitchFamily="49" charset="0"/>
+                <a:ea typeface="Menlo" panose="020B0609030804020204" pitchFamily="49" charset="0"/>
+                <a:cs typeface="Menlo" panose="020B0609030804020204" pitchFamily="49" charset="0"/>
+              </a:rPr>
+              <a:t>f"f_stat</a:t>
+            </a:r>
+            <a:r>
+              <a:rPr lang="en-US" sz="1100" dirty="0">
+                <a:solidFill>
+                  <a:srgbClr val="0070C0"/>
+                </a:solidFill>
+                <a:latin typeface="Menlo" panose="020B0609030804020204" pitchFamily="49" charset="0"/>
+                <a:ea typeface="Menlo" panose="020B0609030804020204" pitchFamily="49" charset="0"/>
+                <a:cs typeface="Menlo" panose="020B0609030804020204" pitchFamily="49" charset="0"/>
+              </a:rPr>
+              <a:t>     = {f_stat:.4f} = </a:t>
+            </a:r>
+            <a:r>
+              <a:rPr lang="en-US" sz="1100" dirty="0" err="1">
+                <a:solidFill>
+                  <a:srgbClr val="0070C0"/>
+                </a:solidFill>
+                <a:latin typeface="Menlo" panose="020B0609030804020204" pitchFamily="49" charset="0"/>
+                <a:ea typeface="Menlo" panose="020B0609030804020204" pitchFamily="49" charset="0"/>
+                <a:cs typeface="Menlo" panose="020B0609030804020204" pitchFamily="49" charset="0"/>
+              </a:rPr>
+              <a:t>var_a</a:t>
+            </a:r>
+            <a:r>
+              <a:rPr lang="en-US" sz="1100" dirty="0">
+                <a:solidFill>
+                  <a:srgbClr val="0070C0"/>
+                </a:solidFill>
+                <a:latin typeface="Menlo" panose="020B0609030804020204" pitchFamily="49" charset="0"/>
+                <a:ea typeface="Menlo" panose="020B0609030804020204" pitchFamily="49" charset="0"/>
+                <a:cs typeface="Menlo" panose="020B0609030804020204" pitchFamily="49" charset="0"/>
+              </a:rPr>
+              <a:t> / </a:t>
+            </a:r>
+            <a:r>
+              <a:rPr lang="en-US" sz="1100" dirty="0" err="1">
+                <a:solidFill>
+                  <a:srgbClr val="0070C0"/>
+                </a:solidFill>
+                <a:latin typeface="Menlo" panose="020B0609030804020204" pitchFamily="49" charset="0"/>
+                <a:ea typeface="Menlo" panose="020B0609030804020204" pitchFamily="49" charset="0"/>
+                <a:cs typeface="Menlo" panose="020B0609030804020204" pitchFamily="49" charset="0"/>
+              </a:rPr>
+              <a:t>var_b</a:t>
+            </a:r>
+            <a:r>
+              <a:rPr lang="en-US" sz="1100" dirty="0">
+                <a:solidFill>
+                  <a:srgbClr val="0070C0"/>
+                </a:solidFill>
+                <a:latin typeface="Menlo" panose="020B0609030804020204" pitchFamily="49" charset="0"/>
+                <a:ea typeface="Menlo" panose="020B0609030804020204" pitchFamily="49" charset="0"/>
+                <a:cs typeface="Menlo" panose="020B0609030804020204" pitchFamily="49" charset="0"/>
+              </a:rPr>
+              <a:t>")</a:t>
+            </a:r>
+          </a:p>
+          <a:p>
+            <a:r>
+              <a:rPr lang="en-US" sz="1100" dirty="0">
+                <a:solidFill>
+                  <a:srgbClr val="0070C0"/>
+                </a:solidFill>
+                <a:latin typeface="Menlo" panose="020B0609030804020204" pitchFamily="49" charset="0"/>
+                <a:ea typeface="Menlo" panose="020B0609030804020204" pitchFamily="49" charset="0"/>
+                <a:cs typeface="Menlo" panose="020B0609030804020204" pitchFamily="49" charset="0"/>
+              </a:rPr>
+              <a:t>print(</a:t>
+            </a:r>
+            <a:r>
+              <a:rPr lang="en-US" sz="1100" dirty="0" err="1">
+                <a:solidFill>
+                  <a:srgbClr val="0070C0"/>
+                </a:solidFill>
+                <a:latin typeface="Menlo" panose="020B0609030804020204" pitchFamily="49" charset="0"/>
+                <a:ea typeface="Menlo" panose="020B0609030804020204" pitchFamily="49" charset="0"/>
+                <a:cs typeface="Menlo" panose="020B0609030804020204" pitchFamily="49" charset="0"/>
+              </a:rPr>
+              <a:t>f"p_val</a:t>
+            </a:r>
+            <a:r>
+              <a:rPr lang="en-US" sz="1100" dirty="0">
+                <a:solidFill>
+                  <a:srgbClr val="0070C0"/>
+                </a:solidFill>
+                <a:latin typeface="Menlo" panose="020B0609030804020204" pitchFamily="49" charset="0"/>
+                <a:ea typeface="Menlo" panose="020B0609030804020204" pitchFamily="49" charset="0"/>
+                <a:cs typeface="Menlo" panose="020B0609030804020204" pitchFamily="49" charset="0"/>
+              </a:rPr>
+              <a:t>      = {p_val:.4f}")</a:t>
+            </a:r>
+          </a:p>
+          <a:p>
+            <a:endParaRPr lang="en-US" sz="1100" dirty="0">
+              <a:solidFill>
+                <a:srgbClr val="0070C0"/>
+              </a:solidFill>
+              <a:latin typeface="Menlo" panose="020B0609030804020204" pitchFamily="49" charset="0"/>
+              <a:ea typeface="Menlo" panose="020B0609030804020204" pitchFamily="49" charset="0"/>
+              <a:cs typeface="Menlo" panose="020B0609030804020204" pitchFamily="49" charset="0"/>
+            </a:endParaRPr>
+          </a:p>
+          <a:p>
+            <a:r>
+              <a:rPr lang="en-US" sz="1100" dirty="0">
+                <a:solidFill>
+                  <a:srgbClr val="0070C0"/>
+                </a:solidFill>
+                <a:latin typeface="Menlo" panose="020B0609030804020204" pitchFamily="49" charset="0"/>
+                <a:ea typeface="Menlo" panose="020B0609030804020204" pitchFamily="49" charset="0"/>
+                <a:cs typeface="Menlo" panose="020B0609030804020204" pitchFamily="49" charset="0"/>
+              </a:rPr>
+              <a:t>if (</a:t>
+            </a:r>
+            <a:r>
+              <a:rPr lang="en-US" sz="1100" dirty="0" err="1">
+                <a:solidFill>
+                  <a:srgbClr val="0070C0"/>
+                </a:solidFill>
+                <a:latin typeface="Menlo" panose="020B0609030804020204" pitchFamily="49" charset="0"/>
+                <a:ea typeface="Menlo" panose="020B0609030804020204" pitchFamily="49" charset="0"/>
+                <a:cs typeface="Menlo" panose="020B0609030804020204" pitchFamily="49" charset="0"/>
+              </a:rPr>
+              <a:t>p_val</a:t>
+            </a:r>
+            <a:r>
+              <a:rPr lang="en-US" sz="1100" dirty="0">
+                <a:solidFill>
+                  <a:srgbClr val="0070C0"/>
+                </a:solidFill>
+                <a:latin typeface="Menlo" panose="020B0609030804020204" pitchFamily="49" charset="0"/>
+                <a:ea typeface="Menlo" panose="020B0609030804020204" pitchFamily="49" charset="0"/>
+                <a:cs typeface="Menlo" panose="020B0609030804020204" pitchFamily="49" charset="0"/>
+              </a:rPr>
+              <a:t> &lt; alpha):</a:t>
+            </a:r>
+          </a:p>
+          <a:p>
+            <a:r>
+              <a:rPr lang="en-US" sz="1100" dirty="0">
+                <a:solidFill>
+                  <a:srgbClr val="0070C0"/>
+                </a:solidFill>
+                <a:latin typeface="Menlo" panose="020B0609030804020204" pitchFamily="49" charset="0"/>
+                <a:ea typeface="Menlo" panose="020B0609030804020204" pitchFamily="49" charset="0"/>
+                <a:cs typeface="Menlo" panose="020B0609030804020204" pitchFamily="49" charset="0"/>
+              </a:rPr>
+              <a:t>    print(</a:t>
+            </a:r>
+            <a:r>
+              <a:rPr lang="en-US" sz="1100" dirty="0" err="1">
+                <a:solidFill>
+                  <a:srgbClr val="0070C0"/>
+                </a:solidFill>
+                <a:latin typeface="Menlo" panose="020B0609030804020204" pitchFamily="49" charset="0"/>
+                <a:ea typeface="Menlo" panose="020B0609030804020204" pitchFamily="49" charset="0"/>
+                <a:cs typeface="Menlo" panose="020B0609030804020204" pitchFamily="49" charset="0"/>
+              </a:rPr>
+              <a:t>f"Reject</a:t>
+            </a:r>
+            <a:r>
+              <a:rPr lang="en-US" sz="1100" dirty="0">
+                <a:solidFill>
+                  <a:srgbClr val="0070C0"/>
+                </a:solidFill>
+                <a:latin typeface="Menlo" panose="020B0609030804020204" pitchFamily="49" charset="0"/>
+                <a:ea typeface="Menlo" panose="020B0609030804020204" pitchFamily="49" charset="0"/>
+                <a:cs typeface="Menlo" panose="020B0609030804020204" pitchFamily="49" charset="0"/>
+              </a:rPr>
+              <a:t> H0")</a:t>
+            </a:r>
+          </a:p>
+          <a:p>
+            <a:r>
+              <a:rPr lang="en-US" sz="1100" dirty="0">
+                <a:solidFill>
+                  <a:srgbClr val="0070C0"/>
+                </a:solidFill>
+                <a:latin typeface="Menlo" panose="020B0609030804020204" pitchFamily="49" charset="0"/>
+                <a:ea typeface="Menlo" panose="020B0609030804020204" pitchFamily="49" charset="0"/>
+                <a:cs typeface="Menlo" panose="020B0609030804020204" pitchFamily="49" charset="0"/>
+              </a:rPr>
+              <a:t>else:</a:t>
+            </a:r>
+          </a:p>
+          <a:p>
+            <a:r>
+              <a:rPr lang="en-US" sz="1100" dirty="0">
+                <a:solidFill>
+                  <a:srgbClr val="0070C0"/>
+                </a:solidFill>
+                <a:latin typeface="Menlo" panose="020B0609030804020204" pitchFamily="49" charset="0"/>
+                <a:ea typeface="Menlo" panose="020B0609030804020204" pitchFamily="49" charset="0"/>
+                <a:cs typeface="Menlo" panose="020B0609030804020204" pitchFamily="49" charset="0"/>
+              </a:rPr>
+              <a:t>    print(</a:t>
+            </a:r>
+            <a:r>
+              <a:rPr lang="en-US" sz="1100" dirty="0" err="1">
+                <a:solidFill>
+                  <a:srgbClr val="0070C0"/>
+                </a:solidFill>
+                <a:latin typeface="Menlo" panose="020B0609030804020204" pitchFamily="49" charset="0"/>
+                <a:ea typeface="Menlo" panose="020B0609030804020204" pitchFamily="49" charset="0"/>
+                <a:cs typeface="Menlo" panose="020B0609030804020204" pitchFamily="49" charset="0"/>
+              </a:rPr>
+              <a:t>f"Accept</a:t>
+            </a:r>
+            <a:r>
+              <a:rPr lang="en-US" sz="1100" dirty="0">
+                <a:solidFill>
+                  <a:srgbClr val="0070C0"/>
+                </a:solidFill>
+                <a:latin typeface="Menlo" panose="020B0609030804020204" pitchFamily="49" charset="0"/>
+                <a:ea typeface="Menlo" panose="020B0609030804020204" pitchFamily="49" charset="0"/>
+                <a:cs typeface="Menlo" panose="020B0609030804020204" pitchFamily="49" charset="0"/>
+              </a:rPr>
+              <a:t> H0")</a:t>
+            </a:r>
+          </a:p>
+        </p:txBody>
+      </p:sp>
+      <p:sp>
+        <p:nvSpPr>
+          <p:cNvPr id="5" name="TextBox 4">
+            <a:extLst>
+              <a:ext uri="{FF2B5EF4-FFF2-40B4-BE49-F238E27FC236}">
+                <a16:creationId xmlns:a16="http://schemas.microsoft.com/office/drawing/2014/main" id="{9150268A-26B1-054C-A9C0-E805B855F77A}"/>
+              </a:ext>
+            </a:extLst>
+          </p:cNvPr>
+          <p:cNvSpPr txBox="1"/>
+          <p:nvPr/>
+        </p:nvSpPr>
+        <p:spPr>
+          <a:xfrm>
+            <a:off x="95541" y="126489"/>
+            <a:ext cx="5504884" cy="523220"/>
+          </a:xfrm>
+          <a:prstGeom prst="rect">
+            <a:avLst/>
+          </a:prstGeom>
+          <a:noFill/>
+        </p:spPr>
+        <p:txBody>
+          <a:bodyPr wrap="square" rtlCol="0">
+            <a:spAutoFit/>
+          </a:bodyPr>
+          <a:lstStyle/>
+          <a:p>
+            <a:r>
+              <a:rPr lang="en-US" sz="2800" b="1" dirty="0">
+                <a:solidFill>
+                  <a:srgbClr val="0070C0"/>
+                </a:solidFill>
+              </a:rPr>
+              <a:t>ANOVA</a:t>
+            </a:r>
+            <a:r>
+              <a:rPr lang="en-US" sz="2800" b="1" dirty="0"/>
+              <a:t> = Analysis of Variance</a:t>
+            </a:r>
+          </a:p>
+        </p:txBody>
+      </p:sp>
+    </p:spTree>
+    <p:extLst>
+      <p:ext uri="{BB962C8B-B14F-4D97-AF65-F5344CB8AC3E}">
+        <p14:creationId xmlns:p14="http://schemas.microsoft.com/office/powerpoint/2010/main" val="2484526832"/>
+      </p:ext>
+    </p:extLst>
+  </p:cSld>
+  <p:clrMapOvr>
+    <a:masterClrMapping/>
+  </p:clrMapOvr>
+</p:sld>
+</file>
+
+<file path=ppt/slides/slide4.xml><?xml version="1.0" encoding="utf-8"?>
+<p:sld xmlns:a="http://schemas.openxmlformats.org/drawingml/2006/main" xmlns:r="http://schemas.openxmlformats.org/officeDocument/2006/relationships" xmlns:p="http://schemas.openxmlformats.org/presentationml/2006/main">
+  <p:cSld>
+    <p:spTree>
+      <p:nvGrpSpPr>
+        <p:cNvPr id="1" name=""/>
+        <p:cNvGrpSpPr/>
+        <p:nvPr/>
+      </p:nvGrpSpPr>
+      <p:grpSpPr>
+        <a:xfrm>
+          <a:off x="0" y="0"/>
+          <a:ext cx="0" cy="0"/>
+          <a:chOff x="0" y="0"/>
+          <a:chExt cx="0" cy="0"/>
+        </a:xfrm>
+      </p:grpSpPr>
+      <p:sp>
+        <p:nvSpPr>
+          <p:cNvPr id="4" name="TextBox 3">
+            <a:extLst>
+              <a:ext uri="{FF2B5EF4-FFF2-40B4-BE49-F238E27FC236}">
                 <a16:creationId xmlns:a16="http://schemas.microsoft.com/office/drawing/2014/main" id="{94089F3D-EFD8-1547-B43B-C1472E956605}"/>
               </a:ext>
             </a:extLst>
@@ -14807,7 +15948,7 @@
 </p:sld>
 </file>
 
-<file path=ppt/slides/slide4.xml><?xml version="1.0" encoding="utf-8"?>
+<file path=ppt/slides/slide5.xml><?xml version="1.0" encoding="utf-8"?>
 <p:sld xmlns:a="http://schemas.openxmlformats.org/drawingml/2006/main" xmlns:r="http://schemas.openxmlformats.org/officeDocument/2006/relationships" xmlns:p="http://schemas.openxmlformats.org/presentationml/2006/main">
   <p:cSld>
     <p:spTree>

--- a/statistics_08_F_ANOVA.pptx
+++ b/statistics_08_F_ANOVA.pptx
@@ -13452,7 +13452,7 @@
         <p:spPr>
           <a:xfrm>
             <a:off x="294694" y="4384072"/>
-            <a:ext cx="5961888" cy="1384995"/>
+            <a:ext cx="5618426" cy="1384995"/>
           </a:xfrm>
           <a:prstGeom prst="rect">
             <a:avLst/>

--- a/statistics_08_F_ANOVA.pptx
+++ b/statistics_08_F_ANOVA.pptx
@@ -13271,8 +13271,8 @@
         </p:blipFill>
         <p:spPr>
           <a:xfrm>
-            <a:off x="6864096" y="0"/>
-            <a:ext cx="5327904" cy="3995928"/>
+            <a:off x="7374162" y="41591"/>
+            <a:ext cx="3852672" cy="2889504"/>
           </a:xfrm>
           <a:prstGeom prst="rect">
             <a:avLst/>
@@ -13452,7 +13452,7 @@
         <p:spPr>
           <a:xfrm>
             <a:off x="294694" y="4384072"/>
-            <a:ext cx="5618426" cy="1384995"/>
+            <a:ext cx="5801306" cy="2031325"/>
           </a:xfrm>
           <a:prstGeom prst="rect">
             <a:avLst/>
@@ -13467,7 +13467,7 @@
           <a:p>
             <a:r>
               <a:rPr lang="en-US" dirty="0"/>
-              <a:t>A random variate of the F-distribution</a:t>
+              <a:t>A random variate of the F-distribution is a ratio:</a:t>
             </a:r>
           </a:p>
           <a:p>
@@ -13476,7 +13476,88 @@
           <a:p>
             <a:r>
               <a:rPr lang="en-US" dirty="0"/>
-              <a:t>                 X = (U</a:t>
+              <a:t>                 </a:t>
+            </a:r>
+            <a:r>
+              <a:rPr lang="en-US" b="1" dirty="0">
+                <a:solidFill>
+                  <a:srgbClr val="0070C0"/>
+                </a:solidFill>
+              </a:rPr>
+              <a:t>F    =    Variance1 / Variance2    =    (U</a:t>
+            </a:r>
+            <a:r>
+              <a:rPr lang="en-US" b="1" baseline="-25000" dirty="0">
+                <a:solidFill>
+                  <a:srgbClr val="0070C0"/>
+                </a:solidFill>
+              </a:rPr>
+              <a:t>1</a:t>
+            </a:r>
+            <a:r>
+              <a:rPr lang="en-US" b="1" dirty="0">
+                <a:solidFill>
+                  <a:srgbClr val="0070C0"/>
+                </a:solidFill>
+              </a:rPr>
+              <a:t>/d</a:t>
+            </a:r>
+            <a:r>
+              <a:rPr lang="en-US" b="1" baseline="-25000" dirty="0">
+                <a:solidFill>
+                  <a:srgbClr val="0070C0"/>
+                </a:solidFill>
+              </a:rPr>
+              <a:t>1</a:t>
+            </a:r>
+            <a:r>
+              <a:rPr lang="en-US" b="1" dirty="0">
+                <a:solidFill>
+                  <a:srgbClr val="0070C0"/>
+                </a:solidFill>
+              </a:rPr>
+              <a:t>) / (U</a:t>
+            </a:r>
+            <a:r>
+              <a:rPr lang="en-US" b="1" baseline="-25000" dirty="0">
+                <a:solidFill>
+                  <a:srgbClr val="0070C0"/>
+                </a:solidFill>
+              </a:rPr>
+              <a:t>2</a:t>
+            </a:r>
+            <a:r>
+              <a:rPr lang="en-US" b="1" dirty="0">
+                <a:solidFill>
+                  <a:srgbClr val="0070C0"/>
+                </a:solidFill>
+              </a:rPr>
+              <a:t>/d</a:t>
+            </a:r>
+            <a:r>
+              <a:rPr lang="en-US" b="1" baseline="-25000" dirty="0">
+                <a:solidFill>
+                  <a:srgbClr val="0070C0"/>
+                </a:solidFill>
+              </a:rPr>
+              <a:t>2</a:t>
+            </a:r>
+            <a:r>
+              <a:rPr lang="en-US" b="1" dirty="0">
+                <a:solidFill>
+                  <a:srgbClr val="0070C0"/>
+                </a:solidFill>
+              </a:rPr>
+              <a:t>)</a:t>
+            </a:r>
+          </a:p>
+          <a:p>
+            <a:endParaRPr lang="en-US" dirty="0"/>
+          </a:p>
+          <a:p>
+            <a:r>
+              <a:rPr lang="en-US" dirty="0"/>
+              <a:t>where U</a:t>
             </a:r>
             <a:r>
               <a:rPr lang="en-US" baseline="-25000" dirty="0"/>
@@ -13484,7 +13565,21 @@
             </a:r>
             <a:r>
               <a:rPr lang="en-US" dirty="0"/>
-              <a:t>/d</a:t>
+              <a:t> and U</a:t>
+            </a:r>
+            <a:r>
+              <a:rPr lang="en-US" baseline="-25000" dirty="0"/>
+              <a:t>2</a:t>
+            </a:r>
+            <a:r>
+              <a:rPr lang="en-US" dirty="0"/>
+              <a:t> are independent and have chi-squared distributions </a:t>
+            </a:r>
+          </a:p>
+          <a:p>
+            <a:r>
+              <a:rPr lang="en-US" dirty="0"/>
+              <a:t>with d</a:t>
             </a:r>
             <a:r>
               <a:rPr lang="en-US" baseline="-25000" dirty="0"/>
@@ -13492,7 +13587,7 @@
             </a:r>
             <a:r>
               <a:rPr lang="en-US" dirty="0"/>
-              <a:t>) / (U</a:t>
+              <a:t> &amp; d</a:t>
             </a:r>
             <a:r>
               <a:rPr lang="en-US" baseline="-25000" dirty="0"/>
@@ -13500,62 +13595,22 @@
             </a:r>
             <a:r>
               <a:rPr lang="en-US" dirty="0"/>
-              <a:t>/d</a:t>
-            </a:r>
-            <a:r>
-              <a:rPr lang="en-US" baseline="-25000" dirty="0"/>
-              <a:t>2</a:t>
-            </a:r>
+              <a:t> degrees of freedom respectively.</a:t>
+            </a:r>
+          </a:p>
+          <a:p>
+            <a:endParaRPr lang="en-US" dirty="0"/>
+          </a:p>
+          <a:p>
             <a:r>
               <a:rPr lang="en-US" dirty="0"/>
-              <a:t>)</a:t>
-            </a:r>
-          </a:p>
-          <a:p>
-            <a:endParaRPr lang="en-US" dirty="0"/>
+              <a:t>If d1=d2=1000, the ratio looks like normal with peak ~1.</a:t>
+            </a:r>
           </a:p>
           <a:p>
             <a:r>
               <a:rPr lang="en-US" dirty="0"/>
-              <a:t>where U</a:t>
-            </a:r>
-            <a:r>
-              <a:rPr lang="en-US" baseline="-25000" dirty="0"/>
-              <a:t>1</a:t>
-            </a:r>
-            <a:r>
-              <a:rPr lang="en-US" dirty="0"/>
-              <a:t> and U</a:t>
-            </a:r>
-            <a:r>
-              <a:rPr lang="en-US" baseline="-25000" dirty="0"/>
-              <a:t>2</a:t>
-            </a:r>
-            <a:r>
-              <a:rPr lang="en-US" dirty="0"/>
-              <a:t> are independent and have chi-squared distributions </a:t>
-            </a:r>
-          </a:p>
-          <a:p>
-            <a:r>
-              <a:rPr lang="en-US" dirty="0"/>
-              <a:t>with d</a:t>
-            </a:r>
-            <a:r>
-              <a:rPr lang="en-US" baseline="-25000" dirty="0"/>
-              <a:t>1</a:t>
-            </a:r>
-            <a:r>
-              <a:rPr lang="en-US" dirty="0"/>
-              <a:t> &amp; d</a:t>
-            </a:r>
-            <a:r>
-              <a:rPr lang="en-US" baseline="-25000" dirty="0"/>
-              <a:t>2</a:t>
-            </a:r>
-            <a:r>
-              <a:rPr lang="en-US" dirty="0"/>
-              <a:t> degrees of freedom respectively.</a:t>
+              <a:t>If numbers are smaller and not-equal – we get skewed shapes.</a:t>
             </a:r>
           </a:p>
         </p:txBody>
@@ -13574,8 +13629,8 @@
         </p:nvSpPr>
         <p:spPr>
           <a:xfrm>
-            <a:off x="6983018" y="3995928"/>
-            <a:ext cx="4864608" cy="2246769"/>
+            <a:off x="7092313" y="2931095"/>
+            <a:ext cx="4914288" cy="1815882"/>
           </a:xfrm>
           <a:prstGeom prst="rect">
             <a:avLst/>
@@ -13589,7 +13644,7 @@
           <a:lstStyle/>
           <a:p>
             <a:r>
-              <a:rPr lang="en-US" sz="2800" b="1" dirty="0">
+              <a:rPr lang="en-US" sz="2400" b="1" dirty="0">
                 <a:solidFill>
                   <a:srgbClr val="0070C0"/>
                 </a:solidFill>
@@ -13600,31 +13655,250 @@
           <a:p>
             <a:r>
               <a:rPr lang="en-US" dirty="0"/>
-              <a:t>We have two "populations" of data.</a:t>
+              <a:t>We have two "populations" of data with normal distributions.</a:t>
             </a:r>
             <a:br>
               <a:rPr lang="en-US" dirty="0"/>
             </a:br>
             <a:r>
               <a:rPr lang="en-US" dirty="0"/>
-              <a:t>They both have normal distributions.</a:t>
-            </a:r>
-            <a:br>
+              <a:t>Our Null hypothesis is that their variances are equal.</a:t>
+            </a:r>
+          </a:p>
+          <a:p>
+            <a:endParaRPr lang="en-US" dirty="0"/>
+          </a:p>
+          <a:p>
+            <a:r>
               <a:rPr lang="en-US" dirty="0"/>
-            </a:br>
-            <a:r>
-              <a:rPr lang="en-US" dirty="0"/>
-              <a:t>Our Null hypothesis is that two independent normal variances are equal.</a:t>
-            </a:r>
-          </a:p>
-          <a:p>
-            <a:endParaRPr lang="en-US" dirty="0"/>
-          </a:p>
-          <a:p>
-            <a:r>
-              <a:rPr lang="en-US" dirty="0"/>
-              <a:t>We observe sums of some appropriately selected squares are then examine them to see whether their ratio is significantly incompatible with this null hypothesis.</a:t>
-            </a:r>
+              <a:t>We calculate the F-value and look where it lands on the appropriate F-distribution to see whether it is significantly incompatible with this null hypothesis.</a:t>
+            </a:r>
+          </a:p>
+        </p:txBody>
+      </p:sp>
+      <p:pic>
+        <p:nvPicPr>
+          <p:cNvPr id="1026" name="Picture 2" descr="One-Way ANOVA | Boundless Statistics">
+            <a:extLst>
+              <a:ext uri="{FF2B5EF4-FFF2-40B4-BE49-F238E27FC236}">
+                <a16:creationId xmlns:a16="http://schemas.microsoft.com/office/drawing/2014/main" id="{C7A0F370-3D48-E849-8F8B-9F4001D1C87E}"/>
+              </a:ext>
+            </a:extLst>
+          </p:cNvPr>
+          <p:cNvPicPr>
+            <a:picLocks noChangeAspect="1" noChangeArrowheads="1"/>
+          </p:cNvPicPr>
+          <p:nvPr/>
+        </p:nvPicPr>
+        <p:blipFill>
+          <a:blip r:embed="rId6">
+            <a:extLst>
+              <a:ext uri="{28A0092B-C50C-407E-A947-70E740481C1C}">
+                <a14:useLocalDpi xmlns:a14="http://schemas.microsoft.com/office/drawing/2010/main"/>
+              </a:ext>
+            </a:extLst>
+          </a:blip>
+          <a:srcRect/>
+          <a:stretch>
+            <a:fillRect/>
+          </a:stretch>
+        </p:blipFill>
+        <p:spPr bwMode="auto">
+          <a:xfrm>
+            <a:off x="8310191" y="4662997"/>
+            <a:ext cx="2478531" cy="1713419"/>
+          </a:xfrm>
+          <a:prstGeom prst="rect">
+            <a:avLst/>
+          </a:prstGeom>
+          <a:noFill/>
+          <a:extLst>
+            <a:ext uri="{909E8E84-426E-40DD-AFC4-6F175D3DCCD1}">
+              <a14:hiddenFill xmlns:a14="http://schemas.microsoft.com/office/drawing/2010/main">
+                <a:solidFill>
+                  <a:srgbClr val="FFFFFF"/>
+                </a:solidFill>
+              </a14:hiddenFill>
+            </a:ext>
+          </a:extLst>
+        </p:spPr>
+      </p:pic>
+      <p:sp>
+        <p:nvSpPr>
+          <p:cNvPr id="2" name="TextBox 1">
+            <a:extLst>
+              <a:ext uri="{FF2B5EF4-FFF2-40B4-BE49-F238E27FC236}">
+                <a16:creationId xmlns:a16="http://schemas.microsoft.com/office/drawing/2014/main" id="{71D965B6-0F2C-B341-AF91-8ED4C2EC8D78}"/>
+              </a:ext>
+            </a:extLst>
+          </p:cNvPr>
+          <p:cNvSpPr txBox="1"/>
+          <p:nvPr/>
+        </p:nvSpPr>
+        <p:spPr>
+          <a:xfrm>
+            <a:off x="10360004" y="6222526"/>
+            <a:ext cx="950976" cy="307777"/>
+          </a:xfrm>
+          <a:prstGeom prst="rect">
+            <a:avLst/>
+          </a:prstGeom>
+          <a:noFill/>
+        </p:spPr>
+        <p:txBody>
+          <a:bodyPr wrap="square" rtlCol="0">
+            <a:spAutoFit/>
+          </a:bodyPr>
+          <a:lstStyle/>
+          <a:p>
+            <a:r>
+              <a:rPr lang="en-US" dirty="0">
+                <a:solidFill>
+                  <a:srgbClr val="0070C0"/>
+                </a:solidFill>
+              </a:rPr>
+              <a:t>Reject H</a:t>
+            </a:r>
+            <a:r>
+              <a:rPr lang="en-US" baseline="-25000" dirty="0">
+                <a:solidFill>
+                  <a:srgbClr val="0070C0"/>
+                </a:solidFill>
+              </a:rPr>
+              <a:t>0</a:t>
+            </a:r>
+          </a:p>
+        </p:txBody>
+      </p:sp>
+      <p:sp>
+        <p:nvSpPr>
+          <p:cNvPr id="12" name="TextBox 11">
+            <a:extLst>
+              <a:ext uri="{FF2B5EF4-FFF2-40B4-BE49-F238E27FC236}">
+                <a16:creationId xmlns:a16="http://schemas.microsoft.com/office/drawing/2014/main" id="{AC25AF86-378E-7449-82C0-54E6A73758B7}"/>
+              </a:ext>
+            </a:extLst>
+          </p:cNvPr>
+          <p:cNvSpPr txBox="1"/>
+          <p:nvPr/>
+        </p:nvSpPr>
+        <p:spPr>
+          <a:xfrm>
+            <a:off x="7968814" y="6222527"/>
+            <a:ext cx="1077649" cy="307777"/>
+          </a:xfrm>
+          <a:prstGeom prst="rect">
+            <a:avLst/>
+          </a:prstGeom>
+          <a:noFill/>
+        </p:spPr>
+        <p:txBody>
+          <a:bodyPr wrap="square" rtlCol="0">
+            <a:spAutoFit/>
+          </a:bodyPr>
+          <a:lstStyle/>
+          <a:p>
+            <a:r>
+              <a:rPr lang="en-US" dirty="0">
+                <a:solidFill>
+                  <a:srgbClr val="0070C0"/>
+                </a:solidFill>
+              </a:rPr>
+              <a:t>Accept H</a:t>
+            </a:r>
+            <a:r>
+              <a:rPr lang="en-US" baseline="-25000" dirty="0">
+                <a:solidFill>
+                  <a:srgbClr val="0070C0"/>
+                </a:solidFill>
+              </a:rPr>
+              <a:t>0</a:t>
+            </a:r>
+          </a:p>
+        </p:txBody>
+      </p:sp>
+      <p:sp>
+        <p:nvSpPr>
+          <p:cNvPr id="3" name="TextBox 2">
+            <a:extLst>
+              <a:ext uri="{FF2B5EF4-FFF2-40B4-BE49-F238E27FC236}">
+                <a16:creationId xmlns:a16="http://schemas.microsoft.com/office/drawing/2014/main" id="{49B7F8C1-BB1C-B74E-8153-2318CDACD4C6}"/>
+              </a:ext>
+            </a:extLst>
+          </p:cNvPr>
+          <p:cNvSpPr txBox="1"/>
+          <p:nvPr/>
+        </p:nvSpPr>
+        <p:spPr>
+          <a:xfrm>
+            <a:off x="9300498" y="4995015"/>
+            <a:ext cx="1365504" cy="307777"/>
+          </a:xfrm>
+          <a:prstGeom prst="rect">
+            <a:avLst/>
+          </a:prstGeom>
+          <a:noFill/>
+        </p:spPr>
+        <p:txBody>
+          <a:bodyPr wrap="square" rtlCol="0">
+            <a:spAutoFit/>
+          </a:bodyPr>
+          <a:lstStyle/>
+          <a:p>
+            <a:r>
+              <a:rPr lang="en-US" dirty="0">
+                <a:solidFill>
+                  <a:srgbClr val="0070C0"/>
+                </a:solidFill>
+              </a:rPr>
+              <a:t>Critical Value</a:t>
+            </a:r>
+          </a:p>
+        </p:txBody>
+      </p:sp>
+      <p:sp>
+        <p:nvSpPr>
+          <p:cNvPr id="13" name="Down Arrow 12">
+            <a:extLst>
+              <a:ext uri="{FF2B5EF4-FFF2-40B4-BE49-F238E27FC236}">
+                <a16:creationId xmlns:a16="http://schemas.microsoft.com/office/drawing/2014/main" id="{D9A19EEE-5A41-9D4C-9B39-BC7B377B7AD8}"/>
+              </a:ext>
+            </a:extLst>
+          </p:cNvPr>
+          <p:cNvSpPr/>
+          <p:nvPr/>
+        </p:nvSpPr>
+        <p:spPr>
+          <a:xfrm rot="1097658">
+            <a:off x="9701636" y="5336826"/>
+            <a:ext cx="45719" cy="300893"/>
+          </a:xfrm>
+          <a:prstGeom prst="downArrow">
+            <a:avLst/>
+          </a:prstGeom>
+        </p:spPr>
+        <p:style>
+          <a:lnRef idx="2">
+            <a:schemeClr val="accent1">
+              <a:shade val="50000"/>
+            </a:schemeClr>
+          </a:lnRef>
+          <a:fillRef idx="1">
+            <a:schemeClr val="accent1"/>
+          </a:fillRef>
+          <a:effectRef idx="0">
+            <a:schemeClr val="accent1"/>
+          </a:effectRef>
+          <a:fontRef idx="minor">
+            <a:schemeClr val="lt1"/>
+          </a:fontRef>
+        </p:style>
+        <p:txBody>
+          <a:bodyPr rtlCol="0" anchor="ctr"/>
+          <a:lstStyle/>
+          <a:p>
+            <a:pPr algn="ctr"/>
+            <a:endParaRPr lang="en-US"/>
           </a:p>
         </p:txBody>
       </p:sp>
